--- a/From One Learner to a Classroom.pptx
+++ b/From One Learner to a Classroom.pptx
@@ -262,7 +262,7 @@
           <a:p>
             <a:fld id="{CFC2934D-C306-49A4-B670-DF2B53FE6E4E}" type="datetimeFigureOut">
               <a:rPr lang="en-US" smtClean="0"/>
-              <a:t>9/23/2025</a:t>
+              <a:t>11/19/2025</a:t>
             </a:fld>
             <a:endParaRPr lang="en-US"/>
           </a:p>
@@ -460,7 +460,7 @@
           <a:p>
             <a:fld id="{CFC2934D-C306-49A4-B670-DF2B53FE6E4E}" type="datetimeFigureOut">
               <a:rPr lang="en-US" smtClean="0"/>
-              <a:t>9/23/2025</a:t>
+              <a:t>11/19/2025</a:t>
             </a:fld>
             <a:endParaRPr lang="en-US"/>
           </a:p>
@@ -668,7 +668,7 @@
           <a:p>
             <a:fld id="{CFC2934D-C306-49A4-B670-DF2B53FE6E4E}" type="datetimeFigureOut">
               <a:rPr lang="en-US" smtClean="0"/>
-              <a:t>9/23/2025</a:t>
+              <a:t>11/19/2025</a:t>
             </a:fld>
             <a:endParaRPr lang="en-US"/>
           </a:p>
@@ -866,7 +866,7 @@
           <a:p>
             <a:fld id="{CFC2934D-C306-49A4-B670-DF2B53FE6E4E}" type="datetimeFigureOut">
               <a:rPr lang="en-US" smtClean="0"/>
-              <a:t>9/23/2025</a:t>
+              <a:t>11/19/2025</a:t>
             </a:fld>
             <a:endParaRPr lang="en-US"/>
           </a:p>
@@ -1141,7 +1141,7 @@
           <a:p>
             <a:fld id="{CFC2934D-C306-49A4-B670-DF2B53FE6E4E}" type="datetimeFigureOut">
               <a:rPr lang="en-US" smtClean="0"/>
-              <a:t>9/23/2025</a:t>
+              <a:t>11/19/2025</a:t>
             </a:fld>
             <a:endParaRPr lang="en-US"/>
           </a:p>
@@ -1406,7 +1406,7 @@
           <a:p>
             <a:fld id="{CFC2934D-C306-49A4-B670-DF2B53FE6E4E}" type="datetimeFigureOut">
               <a:rPr lang="en-US" smtClean="0"/>
-              <a:t>9/23/2025</a:t>
+              <a:t>11/19/2025</a:t>
             </a:fld>
             <a:endParaRPr lang="en-US"/>
           </a:p>
@@ -1818,7 +1818,7 @@
           <a:p>
             <a:fld id="{CFC2934D-C306-49A4-B670-DF2B53FE6E4E}" type="datetimeFigureOut">
               <a:rPr lang="en-US" smtClean="0"/>
-              <a:t>9/23/2025</a:t>
+              <a:t>11/19/2025</a:t>
             </a:fld>
             <a:endParaRPr lang="en-US"/>
           </a:p>
@@ -1959,7 +1959,7 @@
           <a:p>
             <a:fld id="{CFC2934D-C306-49A4-B670-DF2B53FE6E4E}" type="datetimeFigureOut">
               <a:rPr lang="en-US" smtClean="0"/>
-              <a:t>9/23/2025</a:t>
+              <a:t>11/19/2025</a:t>
             </a:fld>
             <a:endParaRPr lang="en-US"/>
           </a:p>
@@ -2072,7 +2072,7 @@
           <a:p>
             <a:fld id="{CFC2934D-C306-49A4-B670-DF2B53FE6E4E}" type="datetimeFigureOut">
               <a:rPr lang="en-US" smtClean="0"/>
-              <a:t>9/23/2025</a:t>
+              <a:t>11/19/2025</a:t>
             </a:fld>
             <a:endParaRPr lang="en-US"/>
           </a:p>
@@ -2383,7 +2383,7 @@
           <a:p>
             <a:fld id="{CFC2934D-C306-49A4-B670-DF2B53FE6E4E}" type="datetimeFigureOut">
               <a:rPr lang="en-US" smtClean="0"/>
-              <a:t>9/23/2025</a:t>
+              <a:t>11/19/2025</a:t>
             </a:fld>
             <a:endParaRPr lang="en-US"/>
           </a:p>
@@ -2671,7 +2671,7 @@
           <a:p>
             <a:fld id="{CFC2934D-C306-49A4-B670-DF2B53FE6E4E}" type="datetimeFigureOut">
               <a:rPr lang="en-US" smtClean="0"/>
-              <a:t>9/23/2025</a:t>
+              <a:t>11/19/2025</a:t>
             </a:fld>
             <a:endParaRPr lang="en-US"/>
           </a:p>
@@ -2912,7 +2912,7 @@
           <a:p>
             <a:fld id="{CFC2934D-C306-49A4-B670-DF2B53FE6E4E}" type="datetimeFigureOut">
               <a:rPr lang="en-US" smtClean="0"/>
-              <a:t>9/23/2025</a:t>
+              <a:t>11/19/2025</a:t>
             </a:fld>
             <a:endParaRPr lang="en-US"/>
           </a:p>
@@ -3347,486 +3347,26 @@
         </p:nvSpPr>
         <p:spPr/>
         <p:txBody>
-          <a:bodyPr/>
-          <a:lstStyle/>
-          <a:p>
-            <a:r>
-              <a:rPr lang="en-US" dirty="0"/>
-              <a:t>From One Learner to a Classroom</a:t>
-            </a:r>
-          </a:p>
-        </p:txBody>
-      </p:sp>
-      <p:sp>
-        <p:nvSpPr>
-          <p:cNvPr id="6" name="Rectangle 1">
-            <a:extLst>
-              <a:ext uri="{FF2B5EF4-FFF2-40B4-BE49-F238E27FC236}">
-                <a16:creationId xmlns:a16="http://schemas.microsoft.com/office/drawing/2014/main" id="{08012D28-A9A7-C493-4D22-EF6E51725416}"/>
-              </a:ext>
-            </a:extLst>
-          </p:cNvPr>
-          <p:cNvSpPr>
-            <a:spLocks noGrp="1" noChangeArrowheads="1"/>
-          </p:cNvSpPr>
-          <p:nvPr>
-            <p:ph idx="1"/>
-          </p:nvPr>
-        </p:nvSpPr>
-        <p:spPr bwMode="auto">
-          <a:prstGeom prst="rect">
-            <a:avLst/>
-          </a:prstGeom>
-          <a:noFill/>
-          <a:ln>
-            <a:noFill/>
-          </a:ln>
-          <a:effectLst/>
-          <a:extLst>
-            <a:ext uri="{909E8E84-426E-40DD-AFC4-6F175D3DCCD1}">
-              <a14:hiddenFill xmlns:a14="http://schemas.microsoft.com/office/drawing/2010/main">
-                <a:solidFill>
-                  <a:schemeClr val="accent1"/>
-                </a:solidFill>
-              </a14:hiddenFill>
-            </a:ext>
-            <a:ext uri="{91240B29-F687-4F45-9708-019B960494DF}">
-              <a14:hiddenLine xmlns:a14="http://schemas.microsoft.com/office/drawing/2010/main" w="9525">
-                <a:solidFill>
-                  <a:schemeClr val="tx1"/>
-                </a:solidFill>
-                <a:miter lim="800000"/>
-                <a:headEnd/>
-                <a:tailEnd/>
-              </a14:hiddenLine>
-            </a:ext>
-            <a:ext uri="{AF507438-7753-43E0-B8FC-AC1667EBCBE1}">
-              <a14:hiddenEffects xmlns:a14="http://schemas.microsoft.com/office/drawing/2010/main">
-                <a:effectLst>
-                  <a:outerShdw dist="35921" dir="2700000" algn="ctr" rotWithShape="0">
-                    <a:schemeClr val="bg2"/>
-                  </a:outerShdw>
-                </a:effectLst>
-              </a14:hiddenEffects>
-            </a:ext>
-          </a:extLst>
-        </p:spPr>
-        <p:txBody>
-          <a:bodyPr vert="horz" wrap="none" lIns="91440" tIns="45720" rIns="91440" bIns="45720" numCol="1" anchor="ctr" anchorCtr="0" compatLnSpc="1">
-            <a:prstTxWarp prst="textNoShape">
-              <a:avLst/>
-            </a:prstTxWarp>
-            <a:spAutoFit/>
+          <a:bodyPr>
+            <a:normAutofit/>
           </a:bodyPr>
           <a:lstStyle/>
           <a:p>
-            <a:pPr marL="0" marR="0" lvl="0" indent="0" algn="l" defTabSz="914400" rtl="0" eaLnBrk="0" fontAlgn="base" latinLnBrk="0" hangingPunct="0">
-              <a:lnSpc>
-                <a:spcPct val="100000"/>
-              </a:lnSpc>
-              <a:spcBef>
-                <a:spcPct val="0"/>
-              </a:spcBef>
-              <a:spcAft>
-                <a:spcPct val="0"/>
-              </a:spcAft>
-              <a:buClrTx/>
-              <a:buSzTx/>
-              <a:buFontTx/>
-              <a:buChar char="•"/>
-              <a:tabLst/>
-            </a:pPr>
-            <a:r>
-              <a:rPr kumimoji="0" lang="en-US" altLang="en-US" sz="1800" b="0" i="0" u="none" strike="noStrike" cap="none" normalizeH="0" baseline="0" dirty="0">
-                <a:ln>
-                  <a:noFill/>
-                </a:ln>
-                <a:solidFill>
-                  <a:schemeClr val="tx1"/>
-                </a:solidFill>
-                <a:effectLst/>
-                <a:latin typeface="Arial" panose="020B0604020202020204" pitchFamily="34" charset="0"/>
+            <a:r>
+              <a:rPr lang="en-US" sz="2800" b="1" dirty="0">
+                <a:latin typeface="+mn-lt"/>
               </a:rPr>
-              <a:t>Started simple: </a:t>
-            </a:r>
-            <a:r>
-              <a:rPr kumimoji="0" lang="en-US" altLang="en-US" sz="1800" b="1" i="0" u="none" strike="noStrike" cap="none" normalizeH="0" baseline="0" dirty="0">
-                <a:ln>
-                  <a:noFill/>
-                </a:ln>
-                <a:solidFill>
-                  <a:schemeClr val="tx1"/>
-                </a:solidFill>
-                <a:effectLst/>
-                <a:latin typeface="Arial" panose="020B0604020202020204" pitchFamily="34" charset="0"/>
-              </a:rPr>
-              <a:t>single learner tutor</a:t>
-            </a:r>
-            <a:r>
-              <a:rPr kumimoji="0" lang="en-US" altLang="en-US" sz="1800" b="0" i="0" u="none" strike="noStrike" cap="none" normalizeH="0" baseline="0" dirty="0">
-                <a:ln>
-                  <a:noFill/>
-                </a:ln>
-                <a:solidFill>
-                  <a:schemeClr val="tx1"/>
-                </a:solidFill>
-                <a:effectLst/>
-                <a:latin typeface="Arial" panose="020B0604020202020204" pitchFamily="34" charset="0"/>
-              </a:rPr>
-              <a:t> → agent picks items, learner answers, reward based on memory.</a:t>
-            </a:r>
-          </a:p>
-          <a:p>
-            <a:pPr marL="0" marR="0" lvl="0" indent="0" algn="l" defTabSz="914400" rtl="0" eaLnBrk="0" fontAlgn="base" latinLnBrk="0" hangingPunct="0">
-              <a:lnSpc>
-                <a:spcPct val="100000"/>
-              </a:lnSpc>
-              <a:spcBef>
-                <a:spcPct val="0"/>
-              </a:spcBef>
-              <a:spcAft>
-                <a:spcPct val="0"/>
-              </a:spcAft>
-              <a:buClrTx/>
-              <a:buSzTx/>
-              <a:buFontTx/>
-              <a:buChar char="•"/>
-              <a:tabLst/>
-            </a:pPr>
-            <a:r>
-              <a:rPr kumimoji="0" lang="en-US" altLang="en-US" sz="1800" b="0" i="0" u="none" strike="noStrike" cap="none" normalizeH="0" baseline="0" dirty="0">
-                <a:ln>
-                  <a:noFill/>
-                </a:ln>
-                <a:solidFill>
-                  <a:schemeClr val="tx1"/>
-                </a:solidFill>
-                <a:effectLst/>
-                <a:latin typeface="Arial" panose="020B0604020202020204" pitchFamily="34" charset="0"/>
-              </a:rPr>
-              <a:t>Extended to </a:t>
-            </a:r>
-            <a:r>
-              <a:rPr kumimoji="0" lang="en-US" altLang="en-US" sz="1800" b="1" i="0" u="none" strike="noStrike" cap="none" normalizeH="0" baseline="0" dirty="0">
-                <a:ln>
-                  <a:noFill/>
-                </a:ln>
-                <a:solidFill>
-                  <a:schemeClr val="tx1"/>
-                </a:solidFill>
-                <a:effectLst/>
-                <a:latin typeface="Arial" panose="020B0604020202020204" pitchFamily="34" charset="0"/>
-              </a:rPr>
-              <a:t>multi-learner tutor</a:t>
-            </a:r>
-            <a:r>
-              <a:rPr kumimoji="0" lang="en-US" altLang="en-US" sz="1800" b="0" i="0" u="none" strike="noStrike" cap="none" normalizeH="0" baseline="0" dirty="0">
-                <a:ln>
-                  <a:noFill/>
-                </a:ln>
-                <a:solidFill>
-                  <a:schemeClr val="tx1"/>
-                </a:solidFill>
-                <a:effectLst/>
-                <a:latin typeface="Arial" panose="020B0604020202020204" pitchFamily="34" charset="0"/>
-              </a:rPr>
-              <a:t>: now one agent manages a </a:t>
-            </a:r>
-            <a:r>
-              <a:rPr kumimoji="0" lang="en-US" altLang="en-US" sz="1800" b="1" i="0" u="none" strike="noStrike" cap="none" normalizeH="0" baseline="0" dirty="0">
-                <a:ln>
-                  <a:noFill/>
-                </a:ln>
-                <a:solidFill>
-                  <a:schemeClr val="tx1"/>
-                </a:solidFill>
-                <a:effectLst/>
-                <a:latin typeface="Arial" panose="020B0604020202020204" pitchFamily="34" charset="0"/>
-              </a:rPr>
-              <a:t>whole classroom</a:t>
-            </a:r>
-            <a:r>
-              <a:rPr kumimoji="0" lang="en-US" altLang="en-US" sz="1800" b="0" i="0" u="none" strike="noStrike" cap="none" normalizeH="0" baseline="0" dirty="0">
-                <a:ln>
-                  <a:noFill/>
-                </a:ln>
-                <a:solidFill>
-                  <a:schemeClr val="tx1"/>
-                </a:solidFill>
-                <a:effectLst/>
-                <a:latin typeface="Arial" panose="020B0604020202020204" pitchFamily="34" charset="0"/>
-              </a:rPr>
-              <a:t>.</a:t>
-            </a:r>
-          </a:p>
-          <a:p>
-            <a:pPr marL="0" marR="0" lvl="0" indent="0" algn="l" defTabSz="914400" rtl="0" eaLnBrk="0" fontAlgn="base" latinLnBrk="0" hangingPunct="0">
-              <a:lnSpc>
-                <a:spcPct val="100000"/>
-              </a:lnSpc>
-              <a:spcBef>
-                <a:spcPct val="0"/>
-              </a:spcBef>
-              <a:spcAft>
-                <a:spcPct val="0"/>
-              </a:spcAft>
-              <a:buClrTx/>
-              <a:buSzTx/>
-              <a:buFontTx/>
-              <a:buChar char="•"/>
-              <a:tabLst/>
-            </a:pPr>
-            <a:r>
-              <a:rPr kumimoji="0" lang="en-US" altLang="en-US" sz="1800" b="0" i="0" u="none" strike="noStrike" cap="none" normalizeH="0" baseline="0" dirty="0">
-                <a:ln>
-                  <a:noFill/>
-                </a:ln>
-                <a:solidFill>
-                  <a:schemeClr val="tx1"/>
-                </a:solidFill>
-                <a:effectLst/>
-                <a:latin typeface="Arial" panose="020B0604020202020204" pitchFamily="34" charset="0"/>
-              </a:rPr>
-              <a:t>Each learner is </a:t>
-            </a:r>
-            <a:r>
-              <a:rPr kumimoji="0" lang="en-US" altLang="en-US" sz="1800" b="1" i="0" u="none" strike="noStrike" cap="none" normalizeH="0" baseline="0" dirty="0">
-                <a:ln>
-                  <a:noFill/>
-                </a:ln>
-                <a:solidFill>
-                  <a:schemeClr val="tx1"/>
-                </a:solidFill>
-                <a:effectLst/>
-                <a:latin typeface="Arial" panose="020B0604020202020204" pitchFamily="34" charset="0"/>
-              </a:rPr>
-              <a:t>different</a:t>
-            </a:r>
-            <a:r>
-              <a:rPr kumimoji="0" lang="en-US" altLang="en-US" sz="1800" b="0" i="0" u="none" strike="noStrike" cap="none" normalizeH="0" baseline="0" dirty="0">
-                <a:ln>
-                  <a:noFill/>
-                </a:ln>
-                <a:solidFill>
-                  <a:schemeClr val="tx1"/>
-                </a:solidFill>
-                <a:effectLst/>
-                <a:latin typeface="Arial" panose="020B0604020202020204" pitchFamily="34" charset="0"/>
-              </a:rPr>
-              <a:t>:</a:t>
-            </a:r>
-          </a:p>
-          <a:p>
-            <a:pPr marL="0" marR="0" lvl="0" indent="0" algn="l" defTabSz="914400" rtl="0" eaLnBrk="0" fontAlgn="base" latinLnBrk="0" hangingPunct="0">
-              <a:lnSpc>
-                <a:spcPct val="100000"/>
-              </a:lnSpc>
-              <a:spcBef>
-                <a:spcPct val="0"/>
-              </a:spcBef>
-              <a:spcAft>
-                <a:spcPct val="0"/>
-              </a:spcAft>
-              <a:buClrTx/>
-              <a:buSzTx/>
-              <a:buFontTx/>
-              <a:buChar char="•"/>
-              <a:tabLst/>
-            </a:pPr>
-            <a:r>
-              <a:rPr kumimoji="0" lang="en-US" altLang="en-US" sz="1800" b="1" i="0" u="none" strike="noStrike" cap="none" normalizeH="0" baseline="0" dirty="0">
-                <a:ln>
-                  <a:noFill/>
-                </a:ln>
-                <a:solidFill>
-                  <a:schemeClr val="tx1"/>
-                </a:solidFill>
-                <a:effectLst/>
-                <a:latin typeface="Arial" panose="020B0604020202020204" pitchFamily="34" charset="0"/>
-              </a:rPr>
-              <a:t>α (alpha):</a:t>
-            </a:r>
-            <a:r>
-              <a:rPr kumimoji="0" lang="en-US" altLang="en-US" sz="1800" b="0" i="0" u="none" strike="noStrike" cap="none" normalizeH="0" baseline="0" dirty="0">
-                <a:ln>
-                  <a:noFill/>
-                </a:ln>
-                <a:solidFill>
-                  <a:schemeClr val="tx1"/>
-                </a:solidFill>
-                <a:effectLst/>
-                <a:latin typeface="Arial" panose="020B0604020202020204" pitchFamily="34" charset="0"/>
-              </a:rPr>
-              <a:t> how fast they forget.</a:t>
-            </a:r>
-          </a:p>
-          <a:p>
-            <a:pPr marL="0" marR="0" lvl="0" indent="0" algn="l" defTabSz="914400" rtl="0" eaLnBrk="0" fontAlgn="base" latinLnBrk="0" hangingPunct="0">
-              <a:lnSpc>
-                <a:spcPct val="100000"/>
-              </a:lnSpc>
-              <a:spcBef>
-                <a:spcPct val="0"/>
-              </a:spcBef>
-              <a:spcAft>
-                <a:spcPct val="0"/>
-              </a:spcAft>
-              <a:buClrTx/>
-              <a:buSzTx/>
-              <a:buFontTx/>
-              <a:buChar char="•"/>
-              <a:tabLst/>
-            </a:pPr>
-            <a:r>
-              <a:rPr kumimoji="0" lang="en-US" altLang="en-US" sz="1800" b="1" i="0" u="none" strike="noStrike" cap="none" normalizeH="0" baseline="0" dirty="0">
-                <a:ln>
-                  <a:noFill/>
-                </a:ln>
-                <a:solidFill>
-                  <a:schemeClr val="tx1"/>
-                </a:solidFill>
-                <a:effectLst/>
-                <a:latin typeface="Arial" panose="020B0604020202020204" pitchFamily="34" charset="0"/>
-              </a:rPr>
-              <a:t>β (beta):</a:t>
-            </a:r>
-            <a:r>
-              <a:rPr kumimoji="0" lang="en-US" altLang="en-US" sz="1800" b="0" i="0" u="none" strike="noStrike" cap="none" normalizeH="0" baseline="0" dirty="0">
-                <a:ln>
-                  <a:noFill/>
-                </a:ln>
-                <a:solidFill>
-                  <a:schemeClr val="tx1"/>
-                </a:solidFill>
-                <a:effectLst/>
-                <a:latin typeface="Arial" panose="020B0604020202020204" pitchFamily="34" charset="0"/>
-              </a:rPr>
-              <a:t> how much they gain from each review.</a:t>
-            </a:r>
-          </a:p>
-          <a:p>
-            <a:pPr marL="0" marR="0" lvl="0" indent="0" algn="l" defTabSz="914400" rtl="0" eaLnBrk="0" fontAlgn="base" latinLnBrk="0" hangingPunct="0">
-              <a:lnSpc>
-                <a:spcPct val="100000"/>
-              </a:lnSpc>
-              <a:spcBef>
-                <a:spcPct val="0"/>
-              </a:spcBef>
-              <a:spcAft>
-                <a:spcPct val="0"/>
-              </a:spcAft>
-              <a:buClrTx/>
-              <a:buSzTx/>
-              <a:buFontTx/>
-              <a:buChar char="•"/>
-              <a:tabLst/>
-            </a:pPr>
-            <a:r>
-              <a:rPr kumimoji="0" lang="en-US" altLang="en-US" sz="1800" b="0" i="0" u="none" strike="noStrike" cap="none" normalizeH="0" baseline="0" dirty="0">
-                <a:ln>
-                  <a:noFill/>
-                </a:ln>
-                <a:solidFill>
-                  <a:schemeClr val="tx1"/>
-                </a:solidFill>
-                <a:effectLst/>
-                <a:latin typeface="Arial" panose="020B0604020202020204" pitchFamily="34" charset="0"/>
-              </a:rPr>
-              <a:t>This creates a </a:t>
-            </a:r>
-            <a:r>
-              <a:rPr kumimoji="0" lang="en-US" altLang="en-US" sz="1800" b="1" i="0" u="none" strike="noStrike" cap="none" normalizeH="0" baseline="0" dirty="0">
-                <a:ln>
-                  <a:noFill/>
-                </a:ln>
-                <a:solidFill>
-                  <a:schemeClr val="tx1"/>
-                </a:solidFill>
-                <a:effectLst/>
-                <a:latin typeface="Arial" panose="020B0604020202020204" pitchFamily="34" charset="0"/>
-              </a:rPr>
-              <a:t>heterogeneous group</a:t>
-            </a:r>
-            <a:r>
-              <a:rPr kumimoji="0" lang="en-US" altLang="en-US" sz="1800" b="0" i="0" u="none" strike="noStrike" cap="none" normalizeH="0" baseline="0" dirty="0">
-                <a:ln>
-                  <a:noFill/>
-                </a:ln>
-                <a:solidFill>
-                  <a:schemeClr val="tx1"/>
-                </a:solidFill>
-                <a:effectLst/>
-                <a:latin typeface="Arial" panose="020B0604020202020204" pitchFamily="34" charset="0"/>
-              </a:rPr>
-              <a:t>: fast learners, slow learners, forgetful learners… just like a real class.</a:t>
-            </a:r>
-          </a:p>
-        </p:txBody>
-      </p:sp>
-    </p:spTree>
-    <p:extLst>
-      <p:ext uri="{BB962C8B-B14F-4D97-AF65-F5344CB8AC3E}">
-        <p14:creationId xmlns:p14="http://schemas.microsoft.com/office/powerpoint/2010/main" val="3004073219"/>
-      </p:ext>
-    </p:extLst>
-  </p:cSld>
-  <p:clrMapOvr>
-    <a:masterClrMapping/>
-  </p:clrMapOvr>
-</p:sld>
-</file>
-
-<file path=ppt/slides/slide2.xml><?xml version="1.0" encoding="utf-8"?>
-<p:sld xmlns:a="http://schemas.openxmlformats.org/drawingml/2006/main" xmlns:r="http://schemas.openxmlformats.org/officeDocument/2006/relationships" xmlns:p="http://schemas.openxmlformats.org/presentationml/2006/main">
-  <p:cSld>
-    <p:spTree>
-      <p:nvGrpSpPr>
-        <p:cNvPr id="1" name=""/>
-        <p:cNvGrpSpPr/>
-        <p:nvPr/>
-      </p:nvGrpSpPr>
-      <p:grpSpPr>
-        <a:xfrm>
-          <a:off x="0" y="0"/>
-          <a:ext cx="0" cy="0"/>
-          <a:chOff x="0" y="0"/>
-          <a:chExt cx="0" cy="0"/>
-        </a:xfrm>
-      </p:grpSpPr>
-      <p:sp>
-        <p:nvSpPr>
-          <p:cNvPr id="2" name="Title 1">
-            <a:extLst>
-              <a:ext uri="{FF2B5EF4-FFF2-40B4-BE49-F238E27FC236}">
-                <a16:creationId xmlns:a16="http://schemas.microsoft.com/office/drawing/2014/main" id="{B3617588-DAD9-3815-07A2-F6FAE5CFE117}"/>
-              </a:ext>
-            </a:extLst>
-          </p:cNvPr>
-          <p:cNvSpPr>
-            <a:spLocks noGrp="1"/>
-          </p:cNvSpPr>
-          <p:nvPr>
-            <p:ph type="title"/>
-          </p:nvPr>
-        </p:nvSpPr>
-        <p:spPr/>
-        <p:txBody>
-          <a:bodyPr/>
-          <a:lstStyle/>
-          <a:p>
-            <a:r>
-              <a:rPr lang="en-US" dirty="0"/>
-              <a:t>The Multi-Learner Environment</a:t>
-            </a:r>
-          </a:p>
-        </p:txBody>
-      </p:sp>
-      <p:sp>
-        <p:nvSpPr>
-          <p:cNvPr id="4" name="Rectangle 1">
-            <a:extLst>
-              <a:ext uri="{FF2B5EF4-FFF2-40B4-BE49-F238E27FC236}">
-                <a16:creationId xmlns:a16="http://schemas.microsoft.com/office/drawing/2014/main" id="{BE00C620-645C-26B9-5A37-83ACE27B6A93}"/>
+              <a:t>Hierarchical Learner Model Setup</a:t>
+            </a:r>
+          </a:p>
+        </p:txBody>
+      </p:sp>
+      <p:sp>
+        <p:nvSpPr>
+          <p:cNvPr id="6" name="Rectangle 1">
+            <a:extLst>
+              <a:ext uri="{FF2B5EF4-FFF2-40B4-BE49-F238E27FC236}">
+                <a16:creationId xmlns:a16="http://schemas.microsoft.com/office/drawing/2014/main" id="{08012D28-A9A7-C493-4D22-EF6E51725416}"/>
               </a:ext>
             </a:extLst>
           </p:cNvPr>
@@ -3839,8 +3379,8 @@
         </p:nvSpPr>
         <p:spPr bwMode="auto">
           <a:xfrm>
-            <a:off x="755904" y="1578795"/>
-            <a:ext cx="8423203" cy="1754326"/>
+            <a:off x="682752" y="1781009"/>
+            <a:ext cx="9329928" cy="2063129"/>
           </a:xfrm>
           <a:prstGeom prst="rect">
             <a:avLst/>
@@ -3880,6 +3420,810 @@
           </a:extLst>
         </p:spPr>
         <p:txBody>
+          <a:bodyPr vert="horz" wrap="square" lIns="91440" tIns="45720" rIns="91440" bIns="45720" numCol="1" anchor="ctr" anchorCtr="0" compatLnSpc="1">
+            <a:prstTxWarp prst="textNoShape">
+              <a:avLst/>
+            </a:prstTxWarp>
+            <a:spAutoFit/>
+          </a:bodyPr>
+          <a:lstStyle/>
+          <a:p>
+            <a:r>
+              <a:rPr lang="en-US" sz="1200" b="1" dirty="0"/>
+              <a:t>Population Structure</a:t>
+            </a:r>
+          </a:p>
+          <a:p>
+            <a:r>
+              <a:rPr lang="en-US" sz="1200" b="1" dirty="0"/>
+              <a:t>Number of learners:</a:t>
+            </a:r>
+            <a:r>
+              <a:rPr lang="en-US" sz="1200" dirty="0"/>
+              <a:t> 8</a:t>
+            </a:r>
+          </a:p>
+          <a:p>
+            <a:r>
+              <a:rPr lang="en-US" sz="1200" b="1" dirty="0"/>
+              <a:t>Number of groups:</a:t>
+            </a:r>
+            <a:r>
+              <a:rPr lang="en-US" sz="1200" dirty="0"/>
+              <a:t> 2</a:t>
+            </a:r>
+          </a:p>
+          <a:p>
+            <a:pPr lvl="1"/>
+            <a:r>
+              <a:rPr lang="en-US" sz="1200" dirty="0"/>
+              <a:t>Group 0 → slow forgetters</a:t>
+            </a:r>
+          </a:p>
+          <a:p>
+            <a:pPr lvl="1"/>
+            <a:r>
+              <a:rPr lang="en-US" sz="1200" dirty="0"/>
+              <a:t>Group 1 → fast forgetters</a:t>
+            </a:r>
+          </a:p>
+          <a:p>
+            <a:r>
+              <a:rPr lang="en-US" sz="1200" b="1" dirty="0"/>
+              <a:t>Group assignment:</a:t>
+            </a:r>
+            <a:endParaRPr lang="en-US" sz="1200" dirty="0"/>
+          </a:p>
+          <a:p>
+            <a:pPr lvl="1"/>
+            <a:r>
+              <a:rPr lang="en-US" sz="1200" dirty="0"/>
+              <a:t>Even-indexed learners → Group 0</a:t>
+            </a:r>
+          </a:p>
+          <a:p>
+            <a:pPr lvl="1"/>
+            <a:r>
+              <a:rPr lang="en-US" sz="1200" dirty="0"/>
+              <a:t>Odd-indexed learners → Group 1</a:t>
+            </a:r>
+          </a:p>
+        </p:txBody>
+      </p:sp>
+      <p:graphicFrame>
+        <p:nvGraphicFramePr>
+          <p:cNvPr id="2" name="Table 1">
+            <a:extLst>
+              <a:ext uri="{FF2B5EF4-FFF2-40B4-BE49-F238E27FC236}">
+                <a16:creationId xmlns:a16="http://schemas.microsoft.com/office/drawing/2014/main" id="{D66FE3C3-759F-32D9-83FF-EAFD38386AE7}"/>
+              </a:ext>
+            </a:extLst>
+          </p:cNvPr>
+          <p:cNvGraphicFramePr>
+            <a:graphicFrameLocks noGrp="1"/>
+          </p:cNvGraphicFramePr>
+          <p:nvPr>
+            <p:extLst>
+              <p:ext uri="{D42A27DB-BD31-4B8C-83A1-F6EECF244321}">
+                <p14:modId xmlns:p14="http://schemas.microsoft.com/office/powerpoint/2010/main" val="2430853878"/>
+              </p:ext>
+            </p:extLst>
+          </p:nvPr>
+        </p:nvGraphicFramePr>
+        <p:xfrm>
+          <a:off x="929640" y="4391213"/>
+          <a:ext cx="10515600" cy="1645920"/>
+        </p:xfrm>
+        <a:graphic>
+          <a:graphicData uri="http://schemas.openxmlformats.org/drawingml/2006/table">
+            <a:tbl>
+              <a:tblPr/>
+              <a:tblGrid>
+                <a:gridCol w="3505200">
+                  <a:extLst>
+                    <a:ext uri="{9D8B030D-6E8A-4147-A177-3AD203B41FA5}">
+                      <a16:colId xmlns:a16="http://schemas.microsoft.com/office/drawing/2014/main" val="2247942001"/>
+                    </a:ext>
+                  </a:extLst>
+                </a:gridCol>
+                <a:gridCol w="3505200">
+                  <a:extLst>
+                    <a:ext uri="{9D8B030D-6E8A-4147-A177-3AD203B41FA5}">
+                      <a16:colId xmlns:a16="http://schemas.microsoft.com/office/drawing/2014/main" val="774052777"/>
+                    </a:ext>
+                  </a:extLst>
+                </a:gridCol>
+                <a:gridCol w="3505200">
+                  <a:extLst>
+                    <a:ext uri="{9D8B030D-6E8A-4147-A177-3AD203B41FA5}">
+                      <a16:colId xmlns:a16="http://schemas.microsoft.com/office/drawing/2014/main" val="3295605543"/>
+                    </a:ext>
+                  </a:extLst>
+                </a:gridCol>
+              </a:tblGrid>
+              <a:tr h="0">
+                <a:tc>
+                  <a:txBody>
+                    <a:bodyPr/>
+                    <a:lstStyle/>
+                    <a:p>
+                      <a:pPr>
+                        <a:buNone/>
+                      </a:pPr>
+                      <a:r>
+                        <a:rPr lang="en-US" sz="1200" dirty="0"/>
+                        <a:t>Parameter</a:t>
+                      </a:r>
+                    </a:p>
+                  </a:txBody>
+                  <a:tcPr anchor="ctr">
+                    <a:lnL>
+                      <a:noFill/>
+                    </a:lnL>
+                    <a:lnR>
+                      <a:noFill/>
+                    </a:lnR>
+                    <a:lnT>
+                      <a:noFill/>
+                    </a:lnT>
+                    <a:lnB>
+                      <a:noFill/>
+                    </a:lnB>
+                    <a:noFill/>
+                  </a:tcPr>
+                </a:tc>
+                <a:tc>
+                  <a:txBody>
+                    <a:bodyPr/>
+                    <a:lstStyle/>
+                    <a:p>
+                      <a:pPr>
+                        <a:buNone/>
+                      </a:pPr>
+                      <a:r>
+                        <a:rPr lang="en-US" sz="1200" dirty="0"/>
+                        <a:t>Meaning</a:t>
+                      </a:r>
+                    </a:p>
+                  </a:txBody>
+                  <a:tcPr anchor="ctr">
+                    <a:lnL>
+                      <a:noFill/>
+                    </a:lnL>
+                    <a:lnR>
+                      <a:noFill/>
+                    </a:lnR>
+                    <a:lnT>
+                      <a:noFill/>
+                    </a:lnT>
+                    <a:lnB>
+                      <a:noFill/>
+                    </a:lnB>
+                    <a:noFill/>
+                  </a:tcPr>
+                </a:tc>
+                <a:tc>
+                  <a:txBody>
+                    <a:bodyPr/>
+                    <a:lstStyle/>
+                    <a:p>
+                      <a:pPr>
+                        <a:buNone/>
+                      </a:pPr>
+                      <a:r>
+                        <a:rPr lang="en-US" sz="1200"/>
+                        <a:t>Value Used</a:t>
+                      </a:r>
+                    </a:p>
+                  </a:txBody>
+                  <a:tcPr anchor="ctr">
+                    <a:lnL>
+                      <a:noFill/>
+                    </a:lnL>
+                    <a:lnR>
+                      <a:noFill/>
+                    </a:lnR>
+                    <a:lnT>
+                      <a:noFill/>
+                    </a:lnT>
+                    <a:lnB>
+                      <a:noFill/>
+                    </a:lnB>
+                    <a:noFill/>
+                  </a:tcPr>
+                </a:tc>
+                <a:extLst>
+                  <a:ext uri="{0D108BD9-81ED-4DB2-BD59-A6C34878D82A}">
+                    <a16:rowId xmlns:a16="http://schemas.microsoft.com/office/drawing/2014/main" val="3415857367"/>
+                  </a:ext>
+                </a:extLst>
+              </a:tr>
+              <a:tr h="0">
+                <a:tc>
+                  <a:txBody>
+                    <a:bodyPr/>
+                    <a:lstStyle/>
+                    <a:p>
+                      <a:pPr>
+                        <a:buNone/>
+                      </a:pPr>
+                      <a:r>
+                        <a:rPr lang="el-GR" sz="1200" b="1"/>
+                        <a:t>α (</a:t>
+                      </a:r>
+                      <a:r>
+                        <a:rPr lang="en-US" sz="1200" b="1"/>
+                        <a:t>alpha)</a:t>
+                      </a:r>
+                      <a:endParaRPr lang="en-US" sz="1200"/>
+                    </a:p>
+                  </a:txBody>
+                  <a:tcPr anchor="ctr">
+                    <a:lnL>
+                      <a:noFill/>
+                    </a:lnL>
+                    <a:lnR>
+                      <a:noFill/>
+                    </a:lnR>
+                    <a:lnT>
+                      <a:noFill/>
+                    </a:lnT>
+                    <a:lnB>
+                      <a:noFill/>
+                    </a:lnB>
+                    <a:noFill/>
+                  </a:tcPr>
+                </a:tc>
+                <a:tc>
+                  <a:txBody>
+                    <a:bodyPr/>
+                    <a:lstStyle/>
+                    <a:p>
+                      <a:pPr>
+                        <a:buNone/>
+                      </a:pPr>
+                      <a:r>
+                        <a:rPr lang="en-US" sz="1200"/>
+                        <a:t>Forgetting rate</a:t>
+                      </a:r>
+                    </a:p>
+                  </a:txBody>
+                  <a:tcPr anchor="ctr">
+                    <a:lnL>
+                      <a:noFill/>
+                    </a:lnL>
+                    <a:lnR>
+                      <a:noFill/>
+                    </a:lnR>
+                    <a:lnT>
+                      <a:noFill/>
+                    </a:lnT>
+                    <a:lnB>
+                      <a:noFill/>
+                    </a:lnB>
+                    <a:noFill/>
+                  </a:tcPr>
+                </a:tc>
+                <a:tc>
+                  <a:txBody>
+                    <a:bodyPr/>
+                    <a:lstStyle/>
+                    <a:p>
+                      <a:pPr>
+                        <a:buNone/>
+                      </a:pPr>
+                      <a:r>
+                        <a:rPr lang="en-US" sz="1200" dirty="0"/>
+                        <a:t>Group-level grid: </a:t>
+                      </a:r>
+                      <a:r>
+                        <a:rPr lang="en-US" sz="1200" b="1" dirty="0"/>
+                        <a:t>2e-6 → 6e-6</a:t>
+                      </a:r>
+                      <a:endParaRPr lang="en-US" sz="1200" dirty="0"/>
+                    </a:p>
+                  </a:txBody>
+                  <a:tcPr anchor="ctr">
+                    <a:lnL>
+                      <a:noFill/>
+                    </a:lnL>
+                    <a:lnR>
+                      <a:noFill/>
+                    </a:lnR>
+                    <a:lnT>
+                      <a:noFill/>
+                    </a:lnT>
+                    <a:lnB>
+                      <a:noFill/>
+                    </a:lnB>
+                    <a:noFill/>
+                  </a:tcPr>
+                </a:tc>
+                <a:extLst>
+                  <a:ext uri="{0D108BD9-81ED-4DB2-BD59-A6C34878D82A}">
+                    <a16:rowId xmlns:a16="http://schemas.microsoft.com/office/drawing/2014/main" val="2780404180"/>
+                  </a:ext>
+                </a:extLst>
+              </a:tr>
+              <a:tr h="0">
+                <a:tc>
+                  <a:txBody>
+                    <a:bodyPr/>
+                    <a:lstStyle/>
+                    <a:p>
+                      <a:pPr>
+                        <a:buNone/>
+                      </a:pPr>
+                      <a:endParaRPr lang="en-US" sz="1200"/>
+                    </a:p>
+                  </a:txBody>
+                  <a:tcPr anchor="ctr">
+                    <a:lnL>
+                      <a:noFill/>
+                    </a:lnL>
+                    <a:lnR>
+                      <a:noFill/>
+                    </a:lnR>
+                    <a:lnT>
+                      <a:noFill/>
+                    </a:lnT>
+                    <a:lnB>
+                      <a:noFill/>
+                    </a:lnB>
+                    <a:noFill/>
+                  </a:tcPr>
+                </a:tc>
+                <a:tc>
+                  <a:txBody>
+                    <a:bodyPr/>
+                    <a:lstStyle/>
+                    <a:p>
+                      <a:pPr>
+                        <a:buNone/>
+                      </a:pPr>
+                      <a:endParaRPr lang="en-US" sz="1200" dirty="0"/>
+                    </a:p>
+                  </a:txBody>
+                  <a:tcPr anchor="ctr">
+                    <a:lnL>
+                      <a:noFill/>
+                    </a:lnL>
+                    <a:lnR>
+                      <a:noFill/>
+                    </a:lnR>
+                    <a:lnT>
+                      <a:noFill/>
+                    </a:lnT>
+                    <a:lnB>
+                      <a:noFill/>
+                    </a:lnB>
+                    <a:noFill/>
+                  </a:tcPr>
+                </a:tc>
+                <a:tc>
+                  <a:txBody>
+                    <a:bodyPr/>
+                    <a:lstStyle/>
+                    <a:p>
+                      <a:pPr>
+                        <a:buNone/>
+                      </a:pPr>
+                      <a:r>
+                        <a:rPr lang="en-US" sz="1200"/>
+                        <a:t>Group 0: </a:t>
+                      </a:r>
+                      <a:r>
+                        <a:rPr lang="en-US" sz="1200" b="1"/>
+                        <a:t>α = 2e-6</a:t>
+                      </a:r>
+                      <a:r>
+                        <a:rPr lang="en-US" sz="1200"/>
+                        <a:t> (slow forgetting)</a:t>
+                      </a:r>
+                    </a:p>
+                  </a:txBody>
+                  <a:tcPr anchor="ctr">
+                    <a:lnL>
+                      <a:noFill/>
+                    </a:lnL>
+                    <a:lnR>
+                      <a:noFill/>
+                    </a:lnR>
+                    <a:lnT>
+                      <a:noFill/>
+                    </a:lnT>
+                    <a:lnB>
+                      <a:noFill/>
+                    </a:lnB>
+                    <a:noFill/>
+                  </a:tcPr>
+                </a:tc>
+                <a:extLst>
+                  <a:ext uri="{0D108BD9-81ED-4DB2-BD59-A6C34878D82A}">
+                    <a16:rowId xmlns:a16="http://schemas.microsoft.com/office/drawing/2014/main" val="2367749414"/>
+                  </a:ext>
+                </a:extLst>
+              </a:tr>
+              <a:tr h="0">
+                <a:tc>
+                  <a:txBody>
+                    <a:bodyPr/>
+                    <a:lstStyle/>
+                    <a:p>
+                      <a:pPr>
+                        <a:buNone/>
+                      </a:pPr>
+                      <a:endParaRPr lang="en-US" sz="1200"/>
+                    </a:p>
+                  </a:txBody>
+                  <a:tcPr anchor="ctr">
+                    <a:lnL>
+                      <a:noFill/>
+                    </a:lnL>
+                    <a:lnR>
+                      <a:noFill/>
+                    </a:lnR>
+                    <a:lnT>
+                      <a:noFill/>
+                    </a:lnT>
+                    <a:lnB>
+                      <a:noFill/>
+                    </a:lnB>
+                    <a:noFill/>
+                  </a:tcPr>
+                </a:tc>
+                <a:tc>
+                  <a:txBody>
+                    <a:bodyPr/>
+                    <a:lstStyle/>
+                    <a:p>
+                      <a:pPr>
+                        <a:buNone/>
+                      </a:pPr>
+                      <a:endParaRPr lang="en-US" sz="1200"/>
+                    </a:p>
+                  </a:txBody>
+                  <a:tcPr anchor="ctr">
+                    <a:lnL>
+                      <a:noFill/>
+                    </a:lnL>
+                    <a:lnR>
+                      <a:noFill/>
+                    </a:lnR>
+                    <a:lnT>
+                      <a:noFill/>
+                    </a:lnT>
+                    <a:lnB>
+                      <a:noFill/>
+                    </a:lnB>
+                    <a:noFill/>
+                  </a:tcPr>
+                </a:tc>
+                <a:tc>
+                  <a:txBody>
+                    <a:bodyPr/>
+                    <a:lstStyle/>
+                    <a:p>
+                      <a:pPr>
+                        <a:buNone/>
+                      </a:pPr>
+                      <a:r>
+                        <a:rPr lang="en-US" sz="1200"/>
+                        <a:t>Group 1: </a:t>
+                      </a:r>
+                      <a:r>
+                        <a:rPr lang="el-GR" sz="1200" b="1"/>
+                        <a:t>α = 6</a:t>
+                      </a:r>
+                      <a:r>
+                        <a:rPr lang="en-US" sz="1200" b="1"/>
+                        <a:t>e-6</a:t>
+                      </a:r>
+                      <a:r>
+                        <a:rPr lang="en-US" sz="1200"/>
+                        <a:t> (fast forgetting)</a:t>
+                      </a:r>
+                    </a:p>
+                  </a:txBody>
+                  <a:tcPr anchor="ctr">
+                    <a:lnL>
+                      <a:noFill/>
+                    </a:lnL>
+                    <a:lnR>
+                      <a:noFill/>
+                    </a:lnR>
+                    <a:lnT>
+                      <a:noFill/>
+                    </a:lnT>
+                    <a:lnB>
+                      <a:noFill/>
+                    </a:lnB>
+                    <a:noFill/>
+                  </a:tcPr>
+                </a:tc>
+                <a:extLst>
+                  <a:ext uri="{0D108BD9-81ED-4DB2-BD59-A6C34878D82A}">
+                    <a16:rowId xmlns:a16="http://schemas.microsoft.com/office/drawing/2014/main" val="1867942699"/>
+                  </a:ext>
+                </a:extLst>
+              </a:tr>
+              <a:tr h="0">
+                <a:tc>
+                  <a:txBody>
+                    <a:bodyPr/>
+                    <a:lstStyle/>
+                    <a:p>
+                      <a:pPr>
+                        <a:buNone/>
+                      </a:pPr>
+                      <a:r>
+                        <a:rPr lang="en-US" sz="1200" b="1" dirty="0"/>
+                        <a:t>Noise on </a:t>
+                      </a:r>
+                      <a:r>
+                        <a:rPr lang="el-GR" sz="1200" b="1" dirty="0"/>
+                        <a:t>α</a:t>
+                      </a:r>
+                      <a:endParaRPr lang="el-GR" sz="1200" dirty="0"/>
+                    </a:p>
+                  </a:txBody>
+                  <a:tcPr anchor="ctr">
+                    <a:lnL>
+                      <a:noFill/>
+                    </a:lnL>
+                    <a:lnR>
+                      <a:noFill/>
+                    </a:lnR>
+                    <a:lnT>
+                      <a:noFill/>
+                    </a:lnT>
+                    <a:lnB>
+                      <a:noFill/>
+                    </a:lnB>
+                    <a:noFill/>
+                  </a:tcPr>
+                </a:tc>
+                <a:tc>
+                  <a:txBody>
+                    <a:bodyPr/>
+                    <a:lstStyle/>
+                    <a:p>
+                      <a:pPr>
+                        <a:buNone/>
+                      </a:pPr>
+                      <a:r>
+                        <a:rPr lang="en-US" sz="1200" dirty="0"/>
+                        <a:t>Individual differences</a:t>
+                      </a:r>
+                    </a:p>
+                  </a:txBody>
+                  <a:tcPr anchor="ctr">
+                    <a:lnL>
+                      <a:noFill/>
+                    </a:lnL>
+                    <a:lnR>
+                      <a:noFill/>
+                    </a:lnR>
+                    <a:lnT>
+                      <a:noFill/>
+                    </a:lnT>
+                    <a:lnB>
+                      <a:noFill/>
+                    </a:lnB>
+                    <a:noFill/>
+                  </a:tcPr>
+                </a:tc>
+                <a:tc>
+                  <a:txBody>
+                    <a:bodyPr/>
+                    <a:lstStyle/>
+                    <a:p>
+                      <a:pPr>
+                        <a:buNone/>
+                      </a:pPr>
+                      <a:r>
+                        <a:rPr lang="en-US" sz="1200" dirty="0"/>
+                        <a:t>± </a:t>
+                      </a:r>
+                      <a:r>
+                        <a:rPr lang="en-US" sz="1200" b="1" dirty="0"/>
+                        <a:t>12%</a:t>
+                      </a:r>
+                      <a:r>
+                        <a:rPr lang="en-US" sz="1200" dirty="0"/>
+                        <a:t>, clamped to [0.7, 1.3] multiplier</a:t>
+                      </a:r>
+                    </a:p>
+                  </a:txBody>
+                  <a:tcPr anchor="ctr">
+                    <a:lnL>
+                      <a:noFill/>
+                    </a:lnL>
+                    <a:lnR>
+                      <a:noFill/>
+                    </a:lnR>
+                    <a:lnT>
+                      <a:noFill/>
+                    </a:lnT>
+                    <a:lnB>
+                      <a:noFill/>
+                    </a:lnB>
+                    <a:noFill/>
+                  </a:tcPr>
+                </a:tc>
+                <a:extLst>
+                  <a:ext uri="{0D108BD9-81ED-4DB2-BD59-A6C34878D82A}">
+                    <a16:rowId xmlns:a16="http://schemas.microsoft.com/office/drawing/2014/main" val="2901660437"/>
+                  </a:ext>
+                </a:extLst>
+              </a:tr>
+              <a:tr h="0">
+                <a:tc>
+                  <a:txBody>
+                    <a:bodyPr/>
+                    <a:lstStyle/>
+                    <a:p>
+                      <a:pPr>
+                        <a:buNone/>
+                      </a:pPr>
+                      <a:r>
+                        <a:rPr lang="el-GR" sz="1200" b="1"/>
+                        <a:t>β (</a:t>
+                      </a:r>
+                      <a:r>
+                        <a:rPr lang="en-US" sz="1200" b="1"/>
+                        <a:t>beta)</a:t>
+                      </a:r>
+                      <a:endParaRPr lang="en-US" sz="1200"/>
+                    </a:p>
+                  </a:txBody>
+                  <a:tcPr anchor="ctr">
+                    <a:lnL>
+                      <a:noFill/>
+                    </a:lnL>
+                    <a:lnR>
+                      <a:noFill/>
+                    </a:lnR>
+                    <a:lnT>
+                      <a:noFill/>
+                    </a:lnT>
+                    <a:lnB>
+                      <a:noFill/>
+                    </a:lnB>
+                    <a:noFill/>
+                  </a:tcPr>
+                </a:tc>
+                <a:tc>
+                  <a:txBody>
+                    <a:bodyPr/>
+                    <a:lstStyle/>
+                    <a:p>
+                      <a:pPr>
+                        <a:buNone/>
+                      </a:pPr>
+                      <a:r>
+                        <a:rPr lang="en-US" sz="1200" dirty="0"/>
+                        <a:t>Learning reinforcement / strengthening</a:t>
+                      </a:r>
+                    </a:p>
+                  </a:txBody>
+                  <a:tcPr anchor="ctr">
+                    <a:lnL>
+                      <a:noFill/>
+                    </a:lnL>
+                    <a:lnR>
+                      <a:noFill/>
+                    </a:lnR>
+                    <a:lnT>
+                      <a:noFill/>
+                    </a:lnT>
+                    <a:lnB>
+                      <a:noFill/>
+                    </a:lnB>
+                    <a:noFill/>
+                  </a:tcPr>
+                </a:tc>
+                <a:tc>
+                  <a:txBody>
+                    <a:bodyPr/>
+                    <a:lstStyle/>
+                    <a:p>
+                      <a:pPr>
+                        <a:buNone/>
+                      </a:pPr>
+                      <a:r>
+                        <a:rPr lang="en-US" sz="1200" b="1" dirty="0"/>
+                        <a:t>Fixed at 0.5</a:t>
+                      </a:r>
+                      <a:r>
+                        <a:rPr lang="en-US" sz="1200" dirty="0"/>
+                        <a:t> for all learners</a:t>
+                      </a:r>
+                    </a:p>
+                  </a:txBody>
+                  <a:tcPr anchor="ctr">
+                    <a:lnL>
+                      <a:noFill/>
+                    </a:lnL>
+                    <a:lnR>
+                      <a:noFill/>
+                    </a:lnR>
+                    <a:lnT>
+                      <a:noFill/>
+                    </a:lnT>
+                    <a:lnB>
+                      <a:noFill/>
+                    </a:lnB>
+                    <a:noFill/>
+                  </a:tcPr>
+                </a:tc>
+                <a:extLst>
+                  <a:ext uri="{0D108BD9-81ED-4DB2-BD59-A6C34878D82A}">
+                    <a16:rowId xmlns:a16="http://schemas.microsoft.com/office/drawing/2014/main" val="4046605004"/>
+                  </a:ext>
+                </a:extLst>
+              </a:tr>
+            </a:tbl>
+          </a:graphicData>
+        </a:graphic>
+      </p:graphicFrame>
+      <p:sp>
+        <p:nvSpPr>
+          <p:cNvPr id="3" name="Rectangle 1">
+            <a:extLst>
+              <a:ext uri="{FF2B5EF4-FFF2-40B4-BE49-F238E27FC236}">
+                <a16:creationId xmlns:a16="http://schemas.microsoft.com/office/drawing/2014/main" id="{880084C4-CA5E-5FD7-D16D-2E48D20668B8}"/>
+              </a:ext>
+            </a:extLst>
+          </p:cNvPr>
+          <p:cNvSpPr>
+            <a:spLocks noChangeArrowheads="1"/>
+          </p:cNvSpPr>
+          <p:nvPr/>
+        </p:nvSpPr>
+        <p:spPr bwMode="auto">
+          <a:xfrm>
+            <a:off x="929640" y="3934459"/>
+            <a:ext cx="2818657" cy="646331"/>
+          </a:xfrm>
+          <a:prstGeom prst="rect">
+            <a:avLst/>
+          </a:prstGeom>
+          <a:noFill/>
+          <a:ln>
+            <a:noFill/>
+          </a:ln>
+          <a:effectLst/>
+          <a:extLst>
+            <a:ext uri="{909E8E84-426E-40DD-AFC4-6F175D3DCCD1}">
+              <a14:hiddenFill xmlns:a14="http://schemas.microsoft.com/office/drawing/2010/main">
+                <a:solidFill>
+                  <a:schemeClr val="accent1"/>
+                </a:solidFill>
+              </a14:hiddenFill>
+            </a:ext>
+            <a:ext uri="{91240B29-F687-4F45-9708-019B960494DF}">
+              <a14:hiddenLine xmlns:a14="http://schemas.microsoft.com/office/drawing/2010/main" w="9525">
+                <a:solidFill>
+                  <a:schemeClr val="tx1"/>
+                </a:solidFill>
+                <a:miter lim="800000"/>
+                <a:headEnd/>
+                <a:tailEnd/>
+              </a14:hiddenLine>
+            </a:ext>
+            <a:ext uri="{AF507438-7753-43E0-B8FC-AC1667EBCBE1}">
+              <a14:hiddenEffects xmlns:a14="http://schemas.microsoft.com/office/drawing/2010/main">
+                <a:effectLst>
+                  <a:outerShdw dist="35921" dir="2700000" algn="ctr" rotWithShape="0">
+                    <a:schemeClr val="bg2"/>
+                  </a:outerShdw>
+                </a:effectLst>
+              </a14:hiddenEffects>
+            </a:ext>
+          </a:extLst>
+        </p:spPr>
+        <p:txBody>
           <a:bodyPr vert="horz" wrap="none" lIns="91440" tIns="45720" rIns="91440" bIns="45720" numCol="1" anchor="ctr" anchorCtr="0" compatLnSpc="1">
             <a:prstTxWarp prst="textNoShape">
               <a:avLst/>
@@ -3901,11 +4245,11 @@
               <a:buClrTx/>
               <a:buSzTx/>
               <a:buFontTx/>
-              <a:buChar char="•"/>
+              <a:buNone/>
               <a:tabLst/>
             </a:pPr>
             <a:r>
-              <a:rPr kumimoji="0" lang="en-US" altLang="en-US" sz="1800" b="1" i="0" u="none" strike="noStrike" cap="none" normalizeH="0" baseline="0" dirty="0">
+              <a:rPr kumimoji="0" lang="en-US" altLang="en-US" b="1" i="0" u="none" strike="noStrike" cap="none" normalizeH="0" baseline="0" dirty="0">
                 <a:ln>
                   <a:noFill/>
                 </a:ln>
@@ -3913,22 +4257,8 @@
                   <a:schemeClr val="tx1"/>
                 </a:solidFill>
                 <a:effectLst/>
-                <a:latin typeface="Arial" panose="020B0604020202020204" pitchFamily="34" charset="0"/>
               </a:rPr>
-              <a:t>Gym environment</a:t>
-            </a:r>
-            <a:r>
-              <a:rPr kumimoji="0" lang="en-US" altLang="en-US" sz="1800" b="0" i="0" u="none" strike="noStrike" cap="none" normalizeH="0" baseline="0" dirty="0">
-                <a:ln>
-                  <a:noFill/>
-                </a:ln>
-                <a:solidFill>
-                  <a:schemeClr val="tx1"/>
-                </a:solidFill>
-                <a:effectLst/>
-                <a:latin typeface="Arial" panose="020B0604020202020204" pitchFamily="34" charset="0"/>
-              </a:rPr>
-              <a:t> </a:t>
+              <a:t>Memory Model Parameters</a:t>
             </a:r>
           </a:p>
           <a:p>
@@ -3945,86 +4275,415 @@
               <a:buClrTx/>
               <a:buSzTx/>
               <a:buFontTx/>
-              <a:buChar char="•"/>
+              <a:buNone/>
               <a:tabLst/>
             </a:pPr>
-            <a:r>
-              <a:rPr kumimoji="0" lang="en-US" altLang="en-US" sz="1800" b="1" i="0" u="none" strike="noStrike" cap="none" normalizeH="0" baseline="0" dirty="0">
-                <a:ln>
-                  <a:noFill/>
-                </a:ln>
+            <a:endParaRPr kumimoji="0" lang="en-US" altLang="en-US" b="0" i="0" u="none" strike="noStrike" cap="none" normalizeH="0" baseline="0" dirty="0">
+              <a:ln>
+                <a:noFill/>
+              </a:ln>
+              <a:solidFill>
+                <a:schemeClr val="tx1"/>
+              </a:solidFill>
+              <a:effectLst/>
+            </a:endParaRPr>
+          </a:p>
+        </p:txBody>
+      </p:sp>
+      <p:sp>
+        <p:nvSpPr>
+          <p:cNvPr id="7" name="TextBox 6">
+            <a:extLst>
+              <a:ext uri="{FF2B5EF4-FFF2-40B4-BE49-F238E27FC236}">
+                <a16:creationId xmlns:a16="http://schemas.microsoft.com/office/drawing/2014/main" id="{065379C2-E6AE-B095-C84F-3B4371EE60A6}"/>
+              </a:ext>
+            </a:extLst>
+          </p:cNvPr>
+          <p:cNvSpPr txBox="1"/>
+          <p:nvPr/>
+        </p:nvSpPr>
+        <p:spPr>
+          <a:xfrm>
+            <a:off x="7006580" y="1158098"/>
+            <a:ext cx="4569714" cy="2554545"/>
+          </a:xfrm>
+          <a:prstGeom prst="rect">
+            <a:avLst/>
+          </a:prstGeom>
+          <a:noFill/>
+        </p:spPr>
+        <p:txBody>
+          <a:bodyPr wrap="square">
+            <a:spAutoFit/>
+          </a:bodyPr>
+          <a:lstStyle/>
+          <a:p>
+            <a:pPr>
+              <a:buNone/>
+            </a:pPr>
+            <a:r>
+              <a:rPr lang="en-US" sz="1600" b="1" dirty="0"/>
+              <a:t>Per-Learner Final </a:t>
+            </a:r>
+            <a:r>
+              <a:rPr lang="el-GR" sz="1600" b="1" dirty="0"/>
+              <a:t>α </a:t>
+            </a:r>
+            <a:r>
+              <a:rPr lang="en-US" sz="1600" b="1" dirty="0"/>
+              <a:t>Values</a:t>
+            </a:r>
+          </a:p>
+          <a:p>
+            <a:pPr>
+              <a:buNone/>
+            </a:pPr>
+            <a:r>
+              <a:rPr lang="en-US" sz="1600" dirty="0"/>
+              <a:t>Each learner gets:</a:t>
+            </a:r>
+            <a:br>
+              <a:rPr lang="en-US" sz="1600" dirty="0"/>
+            </a:br>
+            <a:r>
+              <a:rPr lang="el-GR" sz="1600" b="1" dirty="0"/>
+              <a:t>α</a:t>
+            </a:r>
+            <a:r>
+              <a:rPr lang="en-US" sz="1600" b="1" dirty="0"/>
+              <a:t>ₗ = </a:t>
+            </a:r>
+            <a:r>
+              <a:rPr lang="el-GR" sz="1600" b="1" dirty="0"/>
+              <a:t>α_</a:t>
+            </a:r>
+            <a:r>
+              <a:rPr lang="en-US" sz="1600" b="1" dirty="0"/>
+              <a:t>group × (1 ± noise)</a:t>
+            </a:r>
+            <a:br>
+              <a:rPr lang="en-US" sz="1600" dirty="0"/>
+            </a:br>
+            <a:r>
+              <a:rPr lang="en-US" sz="1600" dirty="0"/>
+              <a:t>Example:</a:t>
+            </a:r>
+          </a:p>
+          <a:p>
+            <a:pPr>
+              <a:buFont typeface="Arial" panose="020B0604020202020204" pitchFamily="34" charset="0"/>
+              <a:buChar char="•"/>
+            </a:pPr>
+            <a:r>
+              <a:rPr lang="en-US" sz="1600" dirty="0"/>
+              <a:t>L0 ≈ 2.08e-6</a:t>
+            </a:r>
+          </a:p>
+          <a:p>
+            <a:pPr>
+              <a:buFont typeface="Arial" panose="020B0604020202020204" pitchFamily="34" charset="0"/>
+              <a:buChar char="•"/>
+            </a:pPr>
+            <a:r>
+              <a:rPr lang="en-US" sz="1600" dirty="0"/>
+              <a:t>L1 ≈ 5.92e-6</a:t>
+            </a:r>
+          </a:p>
+          <a:p>
+            <a:pPr>
+              <a:buFont typeface="Arial" panose="020B0604020202020204" pitchFamily="34" charset="0"/>
+              <a:buChar char="•"/>
+            </a:pPr>
+            <a:r>
+              <a:rPr lang="en-US" sz="1600" dirty="0"/>
+              <a:t>L2 ≈ 1.84e-6</a:t>
+            </a:r>
+          </a:p>
+          <a:p>
+            <a:pPr>
+              <a:buFont typeface="Arial" panose="020B0604020202020204" pitchFamily="34" charset="0"/>
+              <a:buChar char="•"/>
+            </a:pPr>
+            <a:r>
+              <a:rPr lang="en-US" sz="1600" dirty="0"/>
+              <a:t>L3 ≈ 6.12e-6</a:t>
+            </a:r>
+            <a:br>
+              <a:rPr lang="en-US" sz="1600" dirty="0"/>
+            </a:br>
+            <a:r>
+              <a:rPr lang="en-US" sz="1600" dirty="0"/>
+              <a:t>(Actual values vary slightly per run due to noise + seed)</a:t>
+            </a:r>
+          </a:p>
+        </p:txBody>
+      </p:sp>
+    </p:spTree>
+    <p:extLst>
+      <p:ext uri="{BB962C8B-B14F-4D97-AF65-F5344CB8AC3E}">
+        <p14:creationId xmlns:p14="http://schemas.microsoft.com/office/powerpoint/2010/main" val="3004073219"/>
+      </p:ext>
+    </p:extLst>
+  </p:cSld>
+  <p:clrMapOvr>
+    <a:masterClrMapping/>
+  </p:clrMapOvr>
+</p:sld>
+</file>
+
+<file path=ppt/slides/slide2.xml><?xml version="1.0" encoding="utf-8"?>
+<p:sld xmlns:a="http://schemas.openxmlformats.org/drawingml/2006/main" xmlns:r="http://schemas.openxmlformats.org/officeDocument/2006/relationships" xmlns:p="http://schemas.openxmlformats.org/presentationml/2006/main">
+  <p:cSld>
+    <p:spTree>
+      <p:nvGrpSpPr>
+        <p:cNvPr id="1" name=""/>
+        <p:cNvGrpSpPr/>
+        <p:nvPr/>
+      </p:nvGrpSpPr>
+      <p:grpSpPr>
+        <a:xfrm>
+          <a:off x="0" y="0"/>
+          <a:ext cx="0" cy="0"/>
+          <a:chOff x="0" y="0"/>
+          <a:chExt cx="0" cy="0"/>
+        </a:xfrm>
+      </p:grpSpPr>
+      <p:sp>
+        <p:nvSpPr>
+          <p:cNvPr id="2" name="Title 1">
+            <a:extLst>
+              <a:ext uri="{FF2B5EF4-FFF2-40B4-BE49-F238E27FC236}">
+                <a16:creationId xmlns:a16="http://schemas.microsoft.com/office/drawing/2014/main" id="{B3617588-DAD9-3815-07A2-F6FAE5CFE117}"/>
+              </a:ext>
+            </a:extLst>
+          </p:cNvPr>
+          <p:cNvSpPr>
+            <a:spLocks noGrp="1"/>
+          </p:cNvSpPr>
+          <p:nvPr>
+            <p:ph type="title"/>
+          </p:nvPr>
+        </p:nvSpPr>
+        <p:spPr>
+          <a:xfrm>
+            <a:off x="755904" y="76261"/>
+            <a:ext cx="10515600" cy="1325563"/>
+          </a:xfrm>
+        </p:spPr>
+        <p:txBody>
+          <a:bodyPr/>
+          <a:lstStyle/>
+          <a:p>
+            <a:r>
+              <a:rPr lang="en-US" dirty="0"/>
+              <a:t>How the Hierarchical Model Behaves</a:t>
+            </a:r>
+          </a:p>
+        </p:txBody>
+      </p:sp>
+      <p:sp>
+        <p:nvSpPr>
+          <p:cNvPr id="4" name="Rectangle 1">
+            <a:extLst>
+              <a:ext uri="{FF2B5EF4-FFF2-40B4-BE49-F238E27FC236}">
+                <a16:creationId xmlns:a16="http://schemas.microsoft.com/office/drawing/2014/main" id="{BE00C620-645C-26B9-5A37-83ACE27B6A93}"/>
+              </a:ext>
+            </a:extLst>
+          </p:cNvPr>
+          <p:cNvSpPr>
+            <a:spLocks noGrp="1" noChangeArrowheads="1"/>
+          </p:cNvSpPr>
+          <p:nvPr>
+            <p:ph idx="1"/>
+          </p:nvPr>
+        </p:nvSpPr>
+        <p:spPr bwMode="auto">
+          <a:xfrm>
+            <a:off x="920496" y="991792"/>
+            <a:ext cx="7985760" cy="6388416"/>
+          </a:xfrm>
+          <a:prstGeom prst="rect">
+            <a:avLst/>
+          </a:prstGeom>
+          <a:noFill/>
+          <a:ln>
+            <a:noFill/>
+          </a:ln>
+          <a:effectLst/>
+          <a:extLst>
+            <a:ext uri="{909E8E84-426E-40DD-AFC4-6F175D3DCCD1}">
+              <a14:hiddenFill xmlns:a14="http://schemas.microsoft.com/office/drawing/2010/main">
+                <a:solidFill>
+                  <a:schemeClr val="accent1"/>
+                </a:solidFill>
+              </a14:hiddenFill>
+            </a:ext>
+            <a:ext uri="{91240B29-F687-4F45-9708-019B960494DF}">
+              <a14:hiddenLine xmlns:a14="http://schemas.microsoft.com/office/drawing/2010/main" w="9525">
                 <a:solidFill>
                   <a:schemeClr val="tx1"/>
                 </a:solidFill>
-                <a:effectLst/>
-                <a:latin typeface="Arial" panose="020B0604020202020204" pitchFamily="34" charset="0"/>
-              </a:rPr>
-              <a:t>Action space:</a:t>
-            </a:r>
-            <a:r>
-              <a:rPr kumimoji="0" lang="en-US" altLang="en-US" sz="1800" b="0" i="0" u="none" strike="noStrike" cap="none" normalizeH="0" baseline="0" dirty="0">
-                <a:ln>
-                  <a:noFill/>
-                </a:ln>
-                <a:solidFill>
-                  <a:schemeClr val="tx1"/>
-                </a:solidFill>
-                <a:effectLst/>
-                <a:latin typeface="Arial" panose="020B0604020202020204" pitchFamily="34" charset="0"/>
-              </a:rPr>
-              <a:t> agent must pick </a:t>
-            </a:r>
-            <a:r>
-              <a:rPr kumimoji="0" lang="en-US" altLang="en-US" sz="1800" b="1" i="0" u="none" strike="noStrike" cap="none" normalizeH="0" baseline="0" dirty="0">
-                <a:ln>
-                  <a:noFill/>
-                </a:ln>
-                <a:solidFill>
-                  <a:schemeClr val="tx1"/>
-                </a:solidFill>
-                <a:effectLst/>
-                <a:latin typeface="Arial" panose="020B0604020202020204" pitchFamily="34" charset="0"/>
-              </a:rPr>
-              <a:t>one (learner, item)</a:t>
-            </a:r>
-            <a:r>
-              <a:rPr kumimoji="0" lang="en-US" altLang="en-US" sz="1800" b="0" i="0" u="none" strike="noStrike" cap="none" normalizeH="0" baseline="0" dirty="0">
-                <a:ln>
-                  <a:noFill/>
-                </a:ln>
-                <a:solidFill>
-                  <a:schemeClr val="tx1"/>
-                </a:solidFill>
-                <a:effectLst/>
-                <a:latin typeface="Arial" panose="020B0604020202020204" pitchFamily="34" charset="0"/>
-              </a:rPr>
-              <a:t> pair out of </a:t>
-            </a:r>
-            <a:r>
-              <a:rPr kumimoji="0" lang="en-US" altLang="en-US" sz="1800" b="0" i="1" u="none" strike="noStrike" cap="none" normalizeH="0" baseline="0" dirty="0">
-                <a:ln>
-                  <a:noFill/>
-                </a:ln>
-                <a:solidFill>
-                  <a:schemeClr val="tx1"/>
-                </a:solidFill>
-                <a:effectLst/>
-                <a:latin typeface="Arial" panose="020B0604020202020204" pitchFamily="34" charset="0"/>
-              </a:rPr>
-              <a:t>L × I</a:t>
-            </a:r>
-            <a:r>
-              <a:rPr kumimoji="0" lang="en-US" altLang="en-US" sz="1800" b="0" i="0" u="none" strike="noStrike" cap="none" normalizeH="0" baseline="0" dirty="0">
-                <a:ln>
-                  <a:noFill/>
-                </a:ln>
-                <a:solidFill>
-                  <a:schemeClr val="tx1"/>
-                </a:solidFill>
-                <a:effectLst/>
-                <a:latin typeface="Arial" panose="020B0604020202020204" pitchFamily="34" charset="0"/>
-              </a:rPr>
-              <a:t> possibilities.</a:t>
+                <a:miter lim="800000"/>
+                <a:headEnd/>
+                <a:tailEnd/>
+              </a14:hiddenLine>
+            </a:ext>
+            <a:ext uri="{AF507438-7753-43E0-B8FC-AC1667EBCBE1}">
+              <a14:hiddenEffects xmlns:a14="http://schemas.microsoft.com/office/drawing/2010/main">
+                <a:effectLst>
+                  <a:outerShdw dist="35921" dir="2700000" algn="ctr" rotWithShape="0">
+                    <a:schemeClr val="bg2"/>
+                  </a:outerShdw>
+                </a:effectLst>
+              </a14:hiddenEffects>
+            </a:ext>
+          </a:extLst>
+        </p:spPr>
+        <p:txBody>
+          <a:bodyPr vert="horz" wrap="square" lIns="91440" tIns="45720" rIns="91440" bIns="45720" numCol="1" anchor="ctr" anchorCtr="0" compatLnSpc="1">
+            <a:prstTxWarp prst="textNoShape">
+              <a:avLst/>
+            </a:prstTxWarp>
+            <a:spAutoFit/>
+          </a:bodyPr>
+          <a:lstStyle/>
+          <a:p>
+            <a:r>
+              <a:rPr lang="en-US" sz="1800" b="1" dirty="0"/>
+              <a:t>Group-Level Characteristics</a:t>
+            </a:r>
+          </a:p>
+          <a:p>
+            <a:r>
+              <a:rPr lang="en-US" sz="1800" b="1" dirty="0"/>
+              <a:t>Group 0 (</a:t>
+            </a:r>
+            <a:r>
+              <a:rPr lang="el-GR" sz="1800" b="1" dirty="0"/>
+              <a:t>α ~ 2</a:t>
+            </a:r>
+            <a:r>
+              <a:rPr lang="en-US" sz="1800" b="1" dirty="0"/>
+              <a:t>e-6)</a:t>
+            </a:r>
+            <a:endParaRPr lang="en-US" sz="1800" dirty="0"/>
+          </a:p>
+          <a:p>
+            <a:pPr lvl="1"/>
+            <a:r>
+              <a:rPr lang="en-US" sz="1800" dirty="0"/>
+              <a:t>Slow forgetting</a:t>
+            </a:r>
+          </a:p>
+          <a:p>
+            <a:pPr lvl="1"/>
+            <a:r>
+              <a:rPr lang="en-US" sz="1800" dirty="0"/>
+              <a:t>High rolling accuracy</a:t>
+            </a:r>
+          </a:p>
+          <a:p>
+            <a:pPr lvl="1"/>
+            <a:r>
+              <a:rPr lang="en-US" sz="1800" dirty="0"/>
+              <a:t>More stable memory</a:t>
+            </a:r>
+          </a:p>
+          <a:p>
+            <a:pPr lvl="1"/>
+            <a:r>
+              <a:rPr lang="en-US" sz="1800" dirty="0"/>
+              <a:t>Items stay mastered longer</a:t>
+            </a:r>
+          </a:p>
+          <a:p>
+            <a:r>
+              <a:rPr lang="en-US" sz="1800" b="1" dirty="0"/>
+              <a:t>Group 1 (</a:t>
+            </a:r>
+            <a:r>
+              <a:rPr lang="el-GR" sz="1800" b="1" dirty="0"/>
+              <a:t>α ~ 6</a:t>
+            </a:r>
+            <a:r>
+              <a:rPr lang="en-US" sz="1800" b="1" dirty="0"/>
+              <a:t>e-6)</a:t>
+            </a:r>
+            <a:endParaRPr lang="en-US" sz="1800" dirty="0"/>
+          </a:p>
+          <a:p>
+            <a:pPr lvl="1"/>
+            <a:r>
+              <a:rPr lang="en-US" sz="1800" dirty="0"/>
+              <a:t>Fast forgetting</a:t>
+            </a:r>
+          </a:p>
+          <a:p>
+            <a:pPr lvl="1"/>
+            <a:r>
+              <a:rPr lang="en-US" sz="1800" dirty="0"/>
+              <a:t>Accuracy drops quickly</a:t>
+            </a:r>
+          </a:p>
+          <a:p>
+            <a:pPr lvl="1"/>
+            <a:r>
+              <a:rPr lang="en-US" sz="1800" dirty="0"/>
+              <a:t>Needs more frequent review</a:t>
+            </a:r>
+          </a:p>
+          <a:p>
+            <a:pPr lvl="1"/>
+            <a:r>
+              <a:rPr lang="en-US" sz="1800" dirty="0"/>
+              <a:t>PPO attends to them more</a:t>
+            </a:r>
+          </a:p>
+          <a:p>
+            <a:r>
+              <a:rPr lang="en-US" sz="1400" b="1" dirty="0"/>
+              <a:t>What PPO Learns</a:t>
+            </a:r>
+          </a:p>
+          <a:p>
+            <a:r>
+              <a:rPr lang="en-US" sz="1400" dirty="0"/>
+              <a:t>PPO learns </a:t>
+            </a:r>
+            <a:r>
+              <a:rPr lang="en-US" sz="1400" b="1" dirty="0"/>
+              <a:t>different teaching strategies</a:t>
+            </a:r>
+            <a:r>
+              <a:rPr lang="en-US" sz="1400" dirty="0"/>
+              <a:t> automatically:</a:t>
+            </a:r>
+          </a:p>
+          <a:p>
+            <a:pPr lvl="1"/>
+            <a:r>
+              <a:rPr lang="en-US" sz="1400" dirty="0"/>
+              <a:t>More revisits for fast-forgetter group</a:t>
+            </a:r>
+          </a:p>
+          <a:p>
+            <a:pPr lvl="1"/>
+            <a:r>
+              <a:rPr lang="en-US" sz="1400" dirty="0"/>
+              <a:t>Less frequent review for slow-forgetter group</a:t>
+            </a:r>
+          </a:p>
+          <a:p>
+            <a:r>
+              <a:rPr lang="en-US" sz="1400" dirty="0"/>
+              <a:t>Without ever being told group labels</a:t>
+            </a:r>
+            <a:br>
+              <a:rPr lang="en-US" sz="1400" dirty="0"/>
+            </a:br>
+            <a:r>
+              <a:rPr lang="en-US" sz="1400" dirty="0"/>
+              <a:t>(The behavior emerges from α differences.)</a:t>
             </a:r>
           </a:p>
           <a:p>
@@ -4040,36 +4699,9 @@
               </a:spcAft>
               <a:buClrTx/>
               <a:buSzTx/>
-              <a:buFontTx/>
-              <a:buChar char="•"/>
+              <a:buNone/>
               <a:tabLst/>
             </a:pPr>
-            <a:r>
-              <a:rPr kumimoji="0" lang="en-US" altLang="en-US" sz="1800" b="1" i="0" u="none" strike="noStrike" cap="none" normalizeH="0" baseline="0" dirty="0">
-                <a:ln>
-                  <a:noFill/>
-                </a:ln>
-                <a:solidFill>
-                  <a:schemeClr val="tx1"/>
-                </a:solidFill>
-                <a:effectLst/>
-                <a:latin typeface="Arial" panose="020B0604020202020204" pitchFamily="34" charset="0"/>
-              </a:rPr>
-              <a:t>Action masks:</a:t>
-            </a:r>
-            <a:r>
-              <a:rPr kumimoji="0" lang="en-US" altLang="en-US" sz="1800" b="0" i="0" u="none" strike="noStrike" cap="none" normalizeH="0" baseline="0" dirty="0">
-                <a:ln>
-                  <a:noFill/>
-                </a:ln>
-                <a:solidFill>
-                  <a:schemeClr val="tx1"/>
-                </a:solidFill>
-                <a:effectLst/>
-                <a:latin typeface="Arial" panose="020B0604020202020204" pitchFamily="34" charset="0"/>
-              </a:rPr>
-              <a:t> mastered items are hidden from choices.</a:t>
-            </a:r>
             <a:br>
               <a:rPr kumimoji="0" lang="en-US" altLang="en-US" sz="1800" b="0" i="0" u="none" strike="noStrike" cap="none" normalizeH="0" baseline="0" dirty="0">
                 <a:ln>
@@ -4079,7 +4711,6 @@
                   <a:schemeClr val="tx1"/>
                 </a:solidFill>
                 <a:effectLst/>
-                <a:latin typeface="Arial" panose="020B0604020202020204" pitchFamily="34" charset="0"/>
               </a:rPr>
             </a:br>
             <a:br>
@@ -4091,7 +4722,6 @@
                   <a:schemeClr val="tx1"/>
                 </a:solidFill>
                 <a:effectLst/>
-                <a:latin typeface="Arial" panose="020B0604020202020204" pitchFamily="34" charset="0"/>
               </a:rPr>
             </a:br>
             <a:endParaRPr kumimoji="0" lang="en-US" altLang="en-US" sz="1800" b="0" i="0" u="none" strike="noStrike" cap="none" normalizeH="0" baseline="0" dirty="0">
@@ -4102,7 +4732,6 @@
                 <a:schemeClr val="tx1"/>
               </a:solidFill>
               <a:effectLst/>
-              <a:latin typeface="Arial" panose="020B0604020202020204" pitchFamily="34" charset="0"/>
             </a:endParaRPr>
           </a:p>
           <a:p>
@@ -4130,500 +4759,7 @@
                 <a:schemeClr val="tx1"/>
               </a:solidFill>
               <a:effectLst/>
-              <a:latin typeface="Arial" panose="020B0604020202020204" pitchFamily="34" charset="0"/>
             </a:endParaRPr>
-          </a:p>
-        </p:txBody>
-      </p:sp>
-      <mc:AlternateContent xmlns:mc="http://schemas.openxmlformats.org/markup-compatibility/2006">
-        <mc:Choice xmlns:a14="http://schemas.microsoft.com/office/drawing/2010/main" Requires="a14">
-          <p:sp>
-            <p:nvSpPr>
-              <p:cNvPr id="12" name="Rectangle 7">
-                <a:extLst>
-                  <a:ext uri="{FF2B5EF4-FFF2-40B4-BE49-F238E27FC236}">
-                    <a16:creationId xmlns:a16="http://schemas.microsoft.com/office/drawing/2014/main" id="{267793D0-1924-2310-D0F5-0BD246232D33}"/>
-                  </a:ext>
-                </a:extLst>
-              </p:cNvPr>
-              <p:cNvSpPr>
-                <a:spLocks noChangeArrowheads="1"/>
-              </p:cNvSpPr>
-              <p:nvPr/>
-            </p:nvSpPr>
-            <p:spPr bwMode="auto">
-              <a:xfrm>
-                <a:off x="755904" y="3834224"/>
-                <a:ext cx="9487149" cy="2554545"/>
-              </a:xfrm>
-              <a:prstGeom prst="rect">
-                <a:avLst/>
-              </a:prstGeom>
-              <a:noFill/>
-              <a:ln>
-                <a:noFill/>
-              </a:ln>
-              <a:effectLst/>
-              <a:extLst>
-                <a:ext uri="{909E8E84-426E-40DD-AFC4-6F175D3DCCD1}">
-                  <a14:hiddenFill>
-                    <a:solidFill>
-                      <a:schemeClr val="accent1"/>
-                    </a:solidFill>
-                  </a14:hiddenFill>
-                </a:ext>
-                <a:ext uri="{91240B29-F687-4F45-9708-019B960494DF}">
-                  <a14:hiddenLine w="9525">
-                    <a:solidFill>
-                      <a:schemeClr val="tx1"/>
-                    </a:solidFill>
-                    <a:miter lim="800000"/>
-                    <a:headEnd/>
-                    <a:tailEnd/>
-                  </a14:hiddenLine>
-                </a:ext>
-                <a:ext uri="{AF507438-7753-43E0-B8FC-AC1667EBCBE1}">
-                  <a14:hiddenEffects>
-                    <a:effectLst>
-                      <a:outerShdw dist="35921" dir="2700000" algn="ctr" rotWithShape="0">
-                        <a:schemeClr val="bg2"/>
-                      </a:outerShdw>
-                    </a:effectLst>
-                  </a14:hiddenEffects>
-                </a:ext>
-              </a:extLst>
-            </p:spPr>
-            <p:txBody>
-              <a:bodyPr vert="horz" wrap="none" lIns="91440" tIns="45720" rIns="91440" bIns="45720" numCol="1" anchor="ctr" anchorCtr="0" compatLnSpc="1">
-                <a:prstTxWarp prst="textNoShape">
-                  <a:avLst/>
-                </a:prstTxWarp>
-                <a:spAutoFit/>
-              </a:bodyPr>
-              <a:lstStyle/>
-              <a:p>
-                <a:pPr lvl="0" eaLnBrk="0" fontAlgn="base" hangingPunct="0">
-                  <a:spcBef>
-                    <a:spcPct val="0"/>
-                  </a:spcBef>
-                  <a:spcAft>
-                    <a:spcPct val="0"/>
-                  </a:spcAft>
-                  <a:buFontTx/>
-                  <a:buChar char="•"/>
-                </a:pPr>
-                <a:r>
-                  <a:rPr kumimoji="0" lang="en-US" altLang="en-US" b="0" i="0" u="none" strike="noStrike" cap="none" normalizeH="0" baseline="0" dirty="0">
-                    <a:ln>
-                      <a:noFill/>
-                    </a:ln>
-                    <a:solidFill>
-                      <a:schemeClr val="tx1"/>
-                    </a:solidFill>
-                    <a:effectLst/>
-                    <a:latin typeface="Arial Unicode MS"/>
-                  </a:rPr>
-                  <a:t>α =</a:t>
-                </a:r>
-                <a:r>
-                  <a:rPr lang="en-US" dirty="0"/>
-                  <a:t>4.0e-6 + l * 5e-7 where l is the number of learners.(From paper range of alpha, [2×10−7,0.025].</a:t>
-                </a:r>
-              </a:p>
-              <a:p>
-                <a:pPr lvl="0" eaLnBrk="0" fontAlgn="base" hangingPunct="0">
-                  <a:spcBef>
-                    <a:spcPct val="0"/>
-                  </a:spcBef>
-                  <a:spcAft>
-                    <a:spcPct val="0"/>
-                  </a:spcAft>
-                </a:pPr>
-                <a:r>
-                  <a:rPr lang="en-US" b="1" dirty="0"/>
-                  <a:t>So, if l = 0:</a:t>
-                </a:r>
-                <a:r>
-                  <a:rPr lang="en-US" dirty="0"/>
-                  <a:t> </a:t>
-                </a:r>
-                <a14:m>
-                  <m:oMath xmlns:m="http://schemas.openxmlformats.org/officeDocument/2006/math">
-                    <m:r>
-                      <a:rPr lang="en-US"/>
-                      <m:t>4.0</m:t>
-                    </m:r>
-                    <m:r>
-                      <a:rPr lang="en-US" i="1"/>
-                      <m:t>𝑒</m:t>
-                    </m:r>
-                    <m:r>
-                      <a:rPr lang="en-US"/>
-                      <m:t>−6+0=4.0</m:t>
-                    </m:r>
-                    <m:r>
-                      <a:rPr lang="en-US" i="1"/>
-                      <m:t>𝑒</m:t>
-                    </m:r>
-                    <m:r>
-                      <a:rPr lang="en-US"/>
-                      <m:t>−6</m:t>
-                    </m:r>
-                  </m:oMath>
-                </a14:m>
-                <a:r>
-                  <a:rPr lang="en-US" dirty="0"/>
-                  <a:t>,</a:t>
-                </a:r>
-              </a:p>
-              <a:p>
-                <a:pPr lvl="0" eaLnBrk="0" fontAlgn="base" hangingPunct="0">
-                  <a:spcBef>
-                    <a:spcPct val="0"/>
-                  </a:spcBef>
-                  <a:spcAft>
-                    <a:spcPct val="0"/>
-                  </a:spcAft>
-                </a:pPr>
-                <a:r>
-                  <a:rPr lang="en-US" b="1" dirty="0"/>
-                  <a:t>  l = 1:</a:t>
-                </a:r>
-                <a:r>
-                  <a:rPr lang="en-US" dirty="0"/>
-                  <a:t> </a:t>
-                </a:r>
-                <a14:m>
-                  <m:oMath xmlns:m="http://schemas.openxmlformats.org/officeDocument/2006/math">
-                    <m:r>
-                      <a:rPr lang="en-US"/>
-                      <m:t>4.0</m:t>
-                    </m:r>
-                    <m:r>
-                      <a:rPr lang="en-US" i="1"/>
-                      <m:t>𝑒</m:t>
-                    </m:r>
-                    <m:r>
-                      <a:rPr lang="en-US"/>
-                      <m:t>−6+0.5</m:t>
-                    </m:r>
-                    <m:r>
-                      <a:rPr lang="en-US" i="1"/>
-                      <m:t>𝑒</m:t>
-                    </m:r>
-                    <m:r>
-                      <a:rPr lang="en-US"/>
-                      <m:t>−6=4.5</m:t>
-                    </m:r>
-                    <m:r>
-                      <a:rPr lang="en-US" i="1"/>
-                      <m:t>𝑒</m:t>
-                    </m:r>
-                    <m:r>
-                      <a:rPr lang="en-US"/>
-                      <m:t>−6</m:t>
-                    </m:r>
-                  </m:oMath>
-                </a14:m>
-                <a:r>
-                  <a:rPr lang="en-US" dirty="0"/>
-                  <a:t> and so on.</a:t>
-                </a:r>
-              </a:p>
-              <a:p>
-                <a:pPr lvl="0" eaLnBrk="0" fontAlgn="base" hangingPunct="0">
-                  <a:spcBef>
-                    <a:spcPct val="0"/>
-                  </a:spcBef>
-                  <a:spcAft>
-                    <a:spcPct val="0"/>
-                  </a:spcAft>
-                  <a:buFontTx/>
-                  <a:buChar char="•"/>
-                </a:pPr>
-                <a:r>
-                  <a:rPr kumimoji="0" lang="en-US" altLang="en-US" sz="1600" b="0" i="0" u="none" strike="noStrike" cap="none" normalizeH="0" baseline="0" dirty="0">
-                    <a:ln>
-                      <a:noFill/>
-                    </a:ln>
-                    <a:solidFill>
-                      <a:schemeClr val="tx1"/>
-                    </a:solidFill>
-                    <a:effectLst/>
-                  </a:rPr>
-                  <a:t>β =0.5(fixed)</a:t>
-                </a:r>
-              </a:p>
-              <a:p>
-                <a:pPr marL="0" marR="0" lvl="0" indent="0" algn="l" defTabSz="914400" rtl="0" eaLnBrk="0" fontAlgn="base" latinLnBrk="0" hangingPunct="0">
-                  <a:lnSpc>
-                    <a:spcPct val="100000"/>
-                  </a:lnSpc>
-                  <a:spcBef>
-                    <a:spcPct val="0"/>
-                  </a:spcBef>
-                  <a:spcAft>
-                    <a:spcPct val="0"/>
-                  </a:spcAft>
-                  <a:buClrTx/>
-                  <a:buSzTx/>
-                  <a:buFontTx/>
-                  <a:buChar char="•"/>
-                  <a:tabLst/>
-                </a:pPr>
-                <a:r>
-                  <a:rPr kumimoji="0" lang="en-US" altLang="en-US" sz="1800" b="0" i="0" u="none" strike="noStrike" cap="none" normalizeH="0" baseline="0" dirty="0">
-                    <a:ln>
-                      <a:noFill/>
-                    </a:ln>
-                    <a:solidFill>
-                      <a:schemeClr val="tx1"/>
-                    </a:solidFill>
-                    <a:effectLst/>
-                    <a:latin typeface="Arial" panose="020B0604020202020204" pitchFamily="34" charset="0"/>
-                  </a:rPr>
-                  <a:t>Rolling accuracy + “mastery threshold” determine when an item is mastered.</a:t>
-                </a:r>
-              </a:p>
-              <a:p>
-                <a:pPr lvl="0" eaLnBrk="0" fontAlgn="base" hangingPunct="0">
-                  <a:spcBef>
-                    <a:spcPct val="0"/>
-                  </a:spcBef>
-                  <a:spcAft>
-                    <a:spcPct val="0"/>
-                  </a:spcAft>
-                  <a:buFontTx/>
-                  <a:buChar char="•"/>
-                </a:pPr>
-                <a:r>
-                  <a:rPr lang="en-US" dirty="0"/>
-                  <a:t>Rolling accuracy window = </a:t>
-                </a:r>
-                <a:r>
-                  <a:rPr lang="en-US" b="1" dirty="0"/>
-                  <a:t>50 steps</a:t>
-                </a:r>
-              </a:p>
-              <a:p>
-                <a:pPr lvl="0" eaLnBrk="0" fontAlgn="base" hangingPunct="0">
-                  <a:spcBef>
-                    <a:spcPct val="0"/>
-                  </a:spcBef>
-                  <a:spcAft>
-                    <a:spcPct val="0"/>
-                  </a:spcAft>
-                  <a:buFontTx/>
-                  <a:buChar char="•"/>
-                </a:pPr>
-                <a:r>
-                  <a:rPr lang="en-US" dirty="0" err="1"/>
-                  <a:t>mastery_window</a:t>
-                </a:r>
-                <a:r>
-                  <a:rPr lang="en-US" dirty="0"/>
-                  <a:t>=30</a:t>
-                </a:r>
-              </a:p>
-              <a:p>
-                <a:pPr lvl="0" eaLnBrk="0" fontAlgn="base" hangingPunct="0">
-                  <a:spcBef>
-                    <a:spcPct val="0"/>
-                  </a:spcBef>
-                  <a:spcAft>
-                    <a:spcPct val="0"/>
-                  </a:spcAft>
-                  <a:buFontTx/>
-                  <a:buChar char="•"/>
-                </a:pPr>
-                <a:r>
-                  <a:rPr lang="en-US" dirty="0" err="1"/>
-                  <a:t>mastery_threshold</a:t>
-                </a:r>
-                <a:r>
-                  <a:rPr lang="en-US" dirty="0"/>
-                  <a:t>=0.85</a:t>
-                </a:r>
-                <a:endParaRPr kumimoji="0" lang="en-US" altLang="en-US" sz="1800" b="0" i="0" u="none" strike="noStrike" cap="none" normalizeH="0" baseline="0" dirty="0">
-                  <a:ln>
-                    <a:noFill/>
-                  </a:ln>
-                  <a:solidFill>
-                    <a:schemeClr val="tx1"/>
-                  </a:solidFill>
-                  <a:effectLst/>
-                  <a:latin typeface="Arial" panose="020B0604020202020204" pitchFamily="34" charset="0"/>
-                </a:endParaRPr>
-              </a:p>
-              <a:p>
-                <a:pPr marL="0" marR="0" lvl="0" indent="0" algn="l" defTabSz="914400" rtl="0" eaLnBrk="0" fontAlgn="base" latinLnBrk="0" hangingPunct="0">
-                  <a:lnSpc>
-                    <a:spcPct val="100000"/>
-                  </a:lnSpc>
-                  <a:spcBef>
-                    <a:spcPct val="0"/>
-                  </a:spcBef>
-                  <a:spcAft>
-                    <a:spcPct val="0"/>
-                  </a:spcAft>
-                  <a:buClrTx/>
-                  <a:buSzTx/>
-                  <a:buFontTx/>
-                  <a:buChar char="•"/>
-                  <a:tabLst/>
-                </a:pPr>
-                <a:r>
-                  <a:rPr kumimoji="0" lang="en-US" altLang="en-US" sz="1800" b="0" i="0" u="none" strike="noStrike" cap="none" normalizeH="0" baseline="0" dirty="0">
-                    <a:ln>
-                      <a:noFill/>
-                    </a:ln>
-                    <a:solidFill>
-                      <a:schemeClr val="tx1"/>
-                    </a:solidFill>
-                    <a:effectLst/>
-                    <a:latin typeface="Arial" panose="020B0604020202020204" pitchFamily="34" charset="0"/>
-                  </a:rPr>
-                  <a:t>Result: </a:t>
-                </a:r>
-                <a:r>
-                  <a:rPr kumimoji="0" lang="en-US" altLang="en-US" sz="1800" b="1" i="0" u="none" strike="noStrike" cap="none" normalizeH="0" baseline="0" dirty="0">
-                    <a:ln>
-                      <a:noFill/>
-                    </a:ln>
-                    <a:solidFill>
-                      <a:schemeClr val="tx1"/>
-                    </a:solidFill>
-                    <a:effectLst/>
-                    <a:latin typeface="Arial" panose="020B0604020202020204" pitchFamily="34" charset="0"/>
-                  </a:rPr>
-                  <a:t>classroom diversity emerges naturally</a:t>
-                </a:r>
-                <a:r>
-                  <a:rPr kumimoji="0" lang="en-US" altLang="en-US" sz="1800" b="0" i="0" u="none" strike="noStrike" cap="none" normalizeH="0" baseline="0" dirty="0">
-                    <a:ln>
-                      <a:noFill/>
-                    </a:ln>
-                    <a:solidFill>
-                      <a:schemeClr val="tx1"/>
-                    </a:solidFill>
-                    <a:effectLst/>
-                    <a:latin typeface="Arial" panose="020B0604020202020204" pitchFamily="34" charset="0"/>
-                  </a:rPr>
-                  <a:t>.</a:t>
-                </a:r>
-              </a:p>
-            </p:txBody>
-          </p:sp>
-        </mc:Choice>
-        <mc:Fallback>
-          <p:sp>
-            <p:nvSpPr>
-              <p:cNvPr id="12" name="Rectangle 7">
-                <a:extLst>
-                  <a:ext uri="{FF2B5EF4-FFF2-40B4-BE49-F238E27FC236}">
-                    <a16:creationId xmlns:a16="http://schemas.microsoft.com/office/drawing/2014/main" id="{267793D0-1924-2310-D0F5-0BD246232D33}"/>
-                  </a:ext>
-                </a:extLst>
-              </p:cNvPr>
-              <p:cNvSpPr>
-                <a:spLocks noRot="1" noChangeAspect="1" noMove="1" noResize="1" noEditPoints="1" noAdjustHandles="1" noChangeArrowheads="1" noChangeShapeType="1" noTextEdit="1"/>
-              </p:cNvSpPr>
-              <p:nvPr/>
-            </p:nvSpPr>
-            <p:spPr bwMode="auto">
-              <a:xfrm>
-                <a:off x="755904" y="3834224"/>
-                <a:ext cx="9487149" cy="2554545"/>
-              </a:xfrm>
-              <a:prstGeom prst="rect">
-                <a:avLst/>
-              </a:prstGeom>
-              <a:blipFill>
-                <a:blip r:embed="rId2"/>
-                <a:stretch>
-                  <a:fillRect l="-514" t="-955" b="-3341"/>
-                </a:stretch>
-              </a:blipFill>
-              <a:ln>
-                <a:noFill/>
-              </a:ln>
-              <a:effectLst/>
-              <a:extLst>
-                <a:ext uri="{909E8E84-426E-40DD-AFC4-6F175D3DCCD1}">
-                  <a14:hiddenFill xmlns:a14="http://schemas.microsoft.com/office/drawing/2010/main">
-                    <a:solidFill>
-                      <a:schemeClr val="accent1"/>
-                    </a:solidFill>
-                  </a14:hiddenFill>
-                </a:ext>
-                <a:ext uri="{91240B29-F687-4F45-9708-019B960494DF}">
-                  <a14:hiddenLine xmlns:a14="http://schemas.microsoft.com/office/drawing/2010/main" w="9525">
-                    <a:solidFill>
-                      <a:schemeClr val="tx1"/>
-                    </a:solidFill>
-                    <a:miter lim="800000"/>
-                    <a:headEnd/>
-                    <a:tailEnd/>
-                  </a14:hiddenLine>
-                </a:ext>
-                <a:ext uri="{AF507438-7753-43E0-B8FC-AC1667EBCBE1}">
-                  <a14:hiddenEffects xmlns:a14="http://schemas.microsoft.com/office/drawing/2010/main">
-                    <a:effectLst>
-                      <a:outerShdw dist="35921" dir="2700000" algn="ctr" rotWithShape="0">
-                        <a:schemeClr val="bg2"/>
-                      </a:outerShdw>
-                    </a:effectLst>
-                  </a14:hiddenEffects>
-                </a:ext>
-              </a:extLst>
-            </p:spPr>
-            <p:txBody>
-              <a:bodyPr/>
-              <a:lstStyle/>
-              <a:p>
-                <a:r>
-                  <a:rPr lang="en-US">
-                    <a:noFill/>
-                  </a:rPr>
-                  <a:t> </a:t>
-                </a:r>
-              </a:p>
-            </p:txBody>
-          </p:sp>
-        </mc:Fallback>
-      </mc:AlternateContent>
-      <p:sp>
-        <p:nvSpPr>
-          <p:cNvPr id="14" name="TextBox 13">
-            <a:extLst>
-              <a:ext uri="{FF2B5EF4-FFF2-40B4-BE49-F238E27FC236}">
-                <a16:creationId xmlns:a16="http://schemas.microsoft.com/office/drawing/2014/main" id="{9149CD14-9DD9-F51F-4ECC-6A25BF1C4E3A}"/>
-              </a:ext>
-            </a:extLst>
-          </p:cNvPr>
-          <p:cNvSpPr txBox="1"/>
-          <p:nvPr/>
-        </p:nvSpPr>
-        <p:spPr>
-          <a:xfrm>
-            <a:off x="756947" y="2962220"/>
-            <a:ext cx="6094476" cy="646331"/>
-          </a:xfrm>
-          <a:prstGeom prst="rect">
-            <a:avLst/>
-          </a:prstGeom>
-          <a:noFill/>
-        </p:spPr>
-        <p:txBody>
-          <a:bodyPr wrap="square">
-            <a:spAutoFit/>
-          </a:bodyPr>
-          <a:lstStyle/>
-          <a:p>
-            <a:r>
-              <a:rPr lang="en-US" sz="3600" dirty="0"/>
-              <a:t>Memory Dynamics (α and β)</a:t>
-            </a:r>
           </a:p>
         </p:txBody>
       </p:sp>
@@ -4902,7 +5038,7 @@
                 <a:latin typeface="Arial" panose="020B0604020202020204" pitchFamily="34" charset="0"/>
                 <a:cs typeface="Arial" panose="020B0604020202020204" pitchFamily="34" charset="0"/>
               </a:rPr>
-              <a:t>correct=+1.0, incorrect=−0.5 and -1</a:t>
+              <a:t>correct=+1.0, incorrect=−1</a:t>
             </a:r>
             <a:endParaRPr kumimoji="0" lang="en-US" altLang="en-US" sz="1800" b="0" i="0" u="none" strike="noStrike" cap="none" normalizeH="0" baseline="0" dirty="0">
               <a:ln>
@@ -4927,8 +5063,7 @@
               <a:spcAft>
                 <a:spcPct val="0"/>
               </a:spcAft>
-              <a:buFontTx/>
-              <a:buChar char="•"/>
+              <a:buNone/>
             </a:pPr>
             <a:r>
               <a:rPr kumimoji="0" lang="en-US" altLang="en-US" sz="1800" b="1" i="0" u="none" strike="noStrike" cap="none" normalizeH="0" baseline="0" dirty="0">
